--- a/hinges.pptx
+++ b/hinges.pptx
@@ -5,11 +5,12 @@
     <p:sldMasterId id="2147483648" r:id="rId1"/>
   </p:sldMasterIdLst>
   <p:notesMasterIdLst>
-    <p:notesMasterId r:id="rId4"/>
+    <p:notesMasterId r:id="rId5"/>
   </p:notesMasterIdLst>
   <p:sldIdLst>
     <p:sldId id="261" r:id="rId2"/>
     <p:sldId id="262" r:id="rId3"/>
+    <p:sldId id="263" r:id="rId4"/>
   </p:sldIdLst>
   <p:sldSz cx="12192000" cy="6858000"/>
   <p:notesSz cx="6858000" cy="9144000"/>
@@ -198,7 +199,7 @@
           <a:p>
             <a:fld id="{D2843BDE-B8C0-934E-9704-CBA3B88C1FB8}" type="datetimeFigureOut">
               <a:rPr lang="en-US" smtClean="0"/>
-              <a:t>2/11/23</a:t>
+              <a:t>2/10/24</a:t>
             </a:fld>
             <a:endParaRPr lang="en-US"/>
           </a:p>
@@ -633,6 +634,114 @@
 </p:notes>
 </file>
 
+<file path=ppt/notesSlides/notesSlide3.xml><?xml version="1.0" encoding="utf-8"?>
+<p:notes xmlns:a="http://schemas.openxmlformats.org/drawingml/2006/main" xmlns:r="http://schemas.openxmlformats.org/officeDocument/2006/relationships" xmlns:p="http://schemas.openxmlformats.org/presentationml/2006/main">
+  <p:cSld>
+    <p:spTree>
+      <p:nvGrpSpPr>
+        <p:cNvPr id="1" name="">
+          <a:extLst>
+            <a:ext uri="{FF2B5EF4-FFF2-40B4-BE49-F238E27FC236}">
+              <a16:creationId xmlns:a16="http://schemas.microsoft.com/office/drawing/2014/main" id="{ADCE2001-545C-99D0-05A3-34EAAB5CA049}"/>
+            </a:ext>
+          </a:extLst>
+        </p:cNvPr>
+        <p:cNvGrpSpPr/>
+        <p:nvPr/>
+      </p:nvGrpSpPr>
+      <p:grpSpPr>
+        <a:xfrm>
+          <a:off x="0" y="0"/>
+          <a:ext cx="0" cy="0"/>
+          <a:chOff x="0" y="0"/>
+          <a:chExt cx="0" cy="0"/>
+        </a:xfrm>
+      </p:grpSpPr>
+      <p:sp>
+        <p:nvSpPr>
+          <p:cNvPr id="2" name="Slide Image Placeholder 1">
+            <a:extLst>
+              <a:ext uri="{FF2B5EF4-FFF2-40B4-BE49-F238E27FC236}">
+                <a16:creationId xmlns:a16="http://schemas.microsoft.com/office/drawing/2014/main" id="{1499392E-8F18-4AD6-D26D-2EAA93E40800}"/>
+              </a:ext>
+            </a:extLst>
+          </p:cNvPr>
+          <p:cNvSpPr>
+            <a:spLocks noGrp="1" noRot="1" noChangeAspect="1"/>
+          </p:cNvSpPr>
+          <p:nvPr>
+            <p:ph type="sldImg"/>
+          </p:nvPr>
+        </p:nvSpPr>
+        <p:spPr/>
+      </p:sp>
+      <p:sp>
+        <p:nvSpPr>
+          <p:cNvPr id="3" name="Notes Placeholder 2">
+            <a:extLst>
+              <a:ext uri="{FF2B5EF4-FFF2-40B4-BE49-F238E27FC236}">
+                <a16:creationId xmlns:a16="http://schemas.microsoft.com/office/drawing/2014/main" id="{0B572907-66C1-84CC-5E24-AFA53AA9427E}"/>
+              </a:ext>
+            </a:extLst>
+          </p:cNvPr>
+          <p:cNvSpPr>
+            <a:spLocks noGrp="1"/>
+          </p:cNvSpPr>
+          <p:nvPr>
+            <p:ph type="body" idx="1"/>
+          </p:nvPr>
+        </p:nvSpPr>
+        <p:spPr/>
+        <p:txBody>
+          <a:bodyPr/>
+          <a:lstStyle/>
+          <a:p>
+            <a:endParaRPr lang="en-US" dirty="0"/>
+          </a:p>
+        </p:txBody>
+      </p:sp>
+      <p:sp>
+        <p:nvSpPr>
+          <p:cNvPr id="4" name="Slide Number Placeholder 3">
+            <a:extLst>
+              <a:ext uri="{FF2B5EF4-FFF2-40B4-BE49-F238E27FC236}">
+                <a16:creationId xmlns:a16="http://schemas.microsoft.com/office/drawing/2014/main" id="{2F5FB7D5-126E-2993-4CA4-5B643C76FA09}"/>
+              </a:ext>
+            </a:extLst>
+          </p:cNvPr>
+          <p:cNvSpPr>
+            <a:spLocks noGrp="1"/>
+          </p:cNvSpPr>
+          <p:nvPr>
+            <p:ph type="sldNum" sz="quarter" idx="5"/>
+          </p:nvPr>
+        </p:nvSpPr>
+        <p:spPr/>
+        <p:txBody>
+          <a:bodyPr/>
+          <a:lstStyle/>
+          <a:p>
+            <a:fld id="{BA8B91EE-EA77-074C-ABDE-BAE6359B4E98}" type="slidenum">
+              <a:rPr lang="en-US" smtClean="0"/>
+              <a:t>3</a:t>
+            </a:fld>
+            <a:endParaRPr lang="en-US"/>
+          </a:p>
+        </p:txBody>
+      </p:sp>
+    </p:spTree>
+    <p:extLst>
+      <p:ext uri="{BB962C8B-B14F-4D97-AF65-F5344CB8AC3E}">
+        <p14:creationId xmlns:p14="http://schemas.microsoft.com/office/powerpoint/2010/main" val="2175948219"/>
+      </p:ext>
+    </p:extLst>
+  </p:cSld>
+  <p:clrMapOvr>
+    <a:masterClrMapping/>
+  </p:clrMapOvr>
+</p:notes>
+</file>
+
 <file path=ppt/slideLayouts/slideLayout1.xml><?xml version="1.0" encoding="utf-8"?>
 <p:sldLayout xmlns:a="http://schemas.openxmlformats.org/drawingml/2006/main" xmlns:r="http://schemas.openxmlformats.org/officeDocument/2006/relationships" xmlns:p="http://schemas.openxmlformats.org/presentationml/2006/main" type="title" preserve="1">
   <p:cSld name="Title Slide">
@@ -779,7 +888,7 @@
           <a:lstStyle/>
           <a:p>
             <a:fld id="{5F491023-0B0A-7041-9F06-D25A50EF063B}" type="datetimeFigureOut">
-              <a:t>2/11/23</a:t>
+              <a:t>2/10/24</a:t>
             </a:fld>
             <a:endParaRPr lang="en-US"/>
           </a:p>
@@ -975,7 +1084,7 @@
           <a:lstStyle/>
           <a:p>
             <a:fld id="{5F491023-0B0A-7041-9F06-D25A50EF063B}" type="datetimeFigureOut">
-              <a:t>2/11/23</a:t>
+              <a:t>2/10/24</a:t>
             </a:fld>
             <a:endParaRPr lang="en-US"/>
           </a:p>
@@ -1181,7 +1290,7 @@
           <a:lstStyle/>
           <a:p>
             <a:fld id="{5F491023-0B0A-7041-9F06-D25A50EF063B}" type="datetimeFigureOut">
-              <a:t>2/11/23</a:t>
+              <a:t>2/10/24</a:t>
             </a:fld>
             <a:endParaRPr lang="en-US"/>
           </a:p>
@@ -1377,7 +1486,7 @@
           <a:lstStyle/>
           <a:p>
             <a:fld id="{5F491023-0B0A-7041-9F06-D25A50EF063B}" type="datetimeFigureOut">
-              <a:t>2/11/23</a:t>
+              <a:t>2/10/24</a:t>
             </a:fld>
             <a:endParaRPr lang="en-US"/>
           </a:p>
@@ -1650,7 +1759,7 @@
           <a:lstStyle/>
           <a:p>
             <a:fld id="{5F491023-0B0A-7041-9F06-D25A50EF063B}" type="datetimeFigureOut">
-              <a:t>2/11/23</a:t>
+              <a:t>2/10/24</a:t>
             </a:fld>
             <a:endParaRPr lang="en-US"/>
           </a:p>
@@ -1913,7 +2022,7 @@
           <a:lstStyle/>
           <a:p>
             <a:fld id="{5F491023-0B0A-7041-9F06-D25A50EF063B}" type="datetimeFigureOut">
-              <a:t>2/11/23</a:t>
+              <a:t>2/10/24</a:t>
             </a:fld>
             <a:endParaRPr lang="en-US"/>
           </a:p>
@@ -2323,7 +2432,7 @@
           <a:lstStyle/>
           <a:p>
             <a:fld id="{5F491023-0B0A-7041-9F06-D25A50EF063B}" type="datetimeFigureOut">
-              <a:t>2/11/23</a:t>
+              <a:t>2/10/24</a:t>
             </a:fld>
             <a:endParaRPr lang="en-US"/>
           </a:p>
@@ -2462,7 +2571,7 @@
           <a:lstStyle/>
           <a:p>
             <a:fld id="{5F491023-0B0A-7041-9F06-D25A50EF063B}" type="datetimeFigureOut">
-              <a:t>2/11/23</a:t>
+              <a:t>2/10/24</a:t>
             </a:fld>
             <a:endParaRPr lang="en-US"/>
           </a:p>
@@ -2573,7 +2682,7 @@
           <a:lstStyle/>
           <a:p>
             <a:fld id="{5F491023-0B0A-7041-9F06-D25A50EF063B}" type="datetimeFigureOut">
-              <a:t>2/11/23</a:t>
+              <a:t>2/10/24</a:t>
             </a:fld>
             <a:endParaRPr lang="en-US"/>
           </a:p>
@@ -2882,7 +2991,7 @@
           <a:lstStyle/>
           <a:p>
             <a:fld id="{5F491023-0B0A-7041-9F06-D25A50EF063B}" type="datetimeFigureOut">
-              <a:t>2/11/23</a:t>
+              <a:t>2/10/24</a:t>
             </a:fld>
             <a:endParaRPr lang="en-US"/>
           </a:p>
@@ -3168,7 +3277,7 @@
           <a:lstStyle/>
           <a:p>
             <a:fld id="{5F491023-0B0A-7041-9F06-D25A50EF063B}" type="datetimeFigureOut">
-              <a:t>2/11/23</a:t>
+              <a:t>2/10/24</a:t>
             </a:fld>
             <a:endParaRPr lang="en-US"/>
           </a:p>
@@ -3407,7 +3516,7 @@
           </a:lstStyle>
           <a:p>
             <a:fld id="{5F491023-0B0A-7041-9F06-D25A50EF063B}" type="datetimeFigureOut">
-              <a:t>2/11/23</a:t>
+              <a:t>2/10/24</a:t>
             </a:fld>
             <a:endParaRPr lang="en-US"/>
           </a:p>
@@ -4282,6 +4391,749 @@
     <p:extLst>
       <p:ext uri="{BB962C8B-B14F-4D97-AF65-F5344CB8AC3E}">
         <p14:creationId xmlns:p14="http://schemas.microsoft.com/office/powerpoint/2010/main" val="510357124"/>
+      </p:ext>
+    </p:extLst>
+  </p:cSld>
+  <p:clrMapOvr>
+    <a:masterClrMapping/>
+  </p:clrMapOvr>
+</p:sld>
+</file>
+
+<file path=ppt/slides/slide3.xml><?xml version="1.0" encoding="utf-8"?>
+<p:sld xmlns:a="http://schemas.openxmlformats.org/drawingml/2006/main" xmlns:r="http://schemas.openxmlformats.org/officeDocument/2006/relationships" xmlns:p="http://schemas.openxmlformats.org/presentationml/2006/main">
+  <p:cSld>
+    <p:spTree>
+      <p:nvGrpSpPr>
+        <p:cNvPr id="1" name="">
+          <a:extLst>
+            <a:ext uri="{FF2B5EF4-FFF2-40B4-BE49-F238E27FC236}">
+              <a16:creationId xmlns:a16="http://schemas.microsoft.com/office/drawing/2014/main" id="{CC4BCE40-FAC2-06AC-AEEE-247099B3D348}"/>
+            </a:ext>
+          </a:extLst>
+        </p:cNvPr>
+        <p:cNvGrpSpPr/>
+        <p:nvPr/>
+      </p:nvGrpSpPr>
+      <p:grpSpPr>
+        <a:xfrm>
+          <a:off x="0" y="0"/>
+          <a:ext cx="0" cy="0"/>
+          <a:chOff x="0" y="0"/>
+          <a:chExt cx="0" cy="0"/>
+        </a:xfrm>
+      </p:grpSpPr>
+      <p:sp>
+        <p:nvSpPr>
+          <p:cNvPr id="2" name="TextBox 1">
+            <a:extLst>
+              <a:ext uri="{FF2B5EF4-FFF2-40B4-BE49-F238E27FC236}">
+                <a16:creationId xmlns:a16="http://schemas.microsoft.com/office/drawing/2014/main" id="{50F4EAFB-0C3B-FE5C-A059-BF43CDE1F9EF}"/>
+              </a:ext>
+            </a:extLst>
+          </p:cNvPr>
+          <p:cNvSpPr txBox="1"/>
+          <p:nvPr/>
+        </p:nvSpPr>
+        <p:spPr>
+          <a:xfrm>
+            <a:off x="-1" y="9719"/>
+            <a:ext cx="7660641" cy="400110"/>
+          </a:xfrm>
+          <a:prstGeom prst="rect">
+            <a:avLst/>
+          </a:prstGeom>
+          <a:noFill/>
+        </p:spPr>
+        <p:txBody>
+          <a:bodyPr wrap="square" rtlCol="0">
+            <a:spAutoFit/>
+          </a:bodyPr>
+          <a:lstStyle/>
+          <a:p>
+            <a:pPr algn="l"/>
+            <a:r>
+              <a:rPr lang="en-US" sz="2000" b="1" i="0" dirty="0" err="1">
+                <a:solidFill>
+                  <a:srgbClr val="0F0F0F"/>
+                </a:solidFill>
+                <a:effectLst/>
+                <a:latin typeface="Roboto" panose="02000000000000000000" pitchFamily="2" charset="0"/>
+              </a:rPr>
+              <a:t>Frenchwood</a:t>
+            </a:r>
+            <a:r>
+              <a:rPr lang="en-US" sz="2000" b="1" i="0" dirty="0">
+                <a:solidFill>
+                  <a:srgbClr val="0F0F0F"/>
+                </a:solidFill>
+                <a:effectLst/>
+                <a:latin typeface="Roboto" panose="02000000000000000000" pitchFamily="2" charset="0"/>
+              </a:rPr>
+              <a:t> Inswing Patio Door (Pre-2005) | Andersen Windows</a:t>
+            </a:r>
+          </a:p>
+        </p:txBody>
+      </p:sp>
+      <p:sp>
+        <p:nvSpPr>
+          <p:cNvPr id="3" name="TextBox 2">
+            <a:extLst>
+              <a:ext uri="{FF2B5EF4-FFF2-40B4-BE49-F238E27FC236}">
+                <a16:creationId xmlns:a16="http://schemas.microsoft.com/office/drawing/2014/main" id="{D22540F8-2C96-97E9-50FA-280F0B083D20}"/>
+              </a:ext>
+            </a:extLst>
+          </p:cNvPr>
+          <p:cNvSpPr txBox="1"/>
+          <p:nvPr/>
+        </p:nvSpPr>
+        <p:spPr>
+          <a:xfrm>
+            <a:off x="57749" y="486507"/>
+            <a:ext cx="4114800" cy="3354765"/>
+          </a:xfrm>
+          <a:prstGeom prst="rect">
+            <a:avLst/>
+          </a:prstGeom>
+          <a:solidFill>
+            <a:schemeClr val="accent4">
+              <a:lumMod val="20000"/>
+              <a:lumOff val="80000"/>
+            </a:schemeClr>
+          </a:solidFill>
+          <a:ln>
+            <a:solidFill>
+              <a:srgbClr val="FF0000"/>
+            </a:solidFill>
+          </a:ln>
+        </p:spPr>
+        <p:txBody>
+          <a:bodyPr wrap="square" rtlCol="0">
+            <a:spAutoFit/>
+          </a:bodyPr>
+          <a:lstStyle/>
+          <a:p>
+            <a:r>
+              <a:rPr lang="en-US" sz="1400" i="0" dirty="0">
+                <a:solidFill>
+                  <a:srgbClr val="0F0F0F"/>
+                </a:solidFill>
+                <a:effectLst/>
+                <a:latin typeface="Calibri" panose="020F0502020204030204" pitchFamily="34" charset="0"/>
+                <a:cs typeface="Calibri" panose="020F0502020204030204" pitchFamily="34" charset="0"/>
+              </a:rPr>
+              <a:t>Andersen Windows &amp; Doors - </a:t>
+            </a:r>
+            <a:r>
+              <a:rPr lang="en-US" sz="1000" dirty="0">
+                <a:solidFill>
+                  <a:srgbClr val="0F0F0F"/>
+                </a:solidFill>
+                <a:latin typeface="Calibri" panose="020F0502020204030204" pitchFamily="34" charset="0"/>
+                <a:cs typeface="Calibri" panose="020F0502020204030204" pitchFamily="34" charset="0"/>
+                <a:hlinkClick r:id="rId3"/>
+              </a:rPr>
+              <a:t>https://www.andersenwindows.com</a:t>
+            </a:r>
+            <a:endParaRPr lang="en-US" sz="1000" dirty="0">
+              <a:solidFill>
+                <a:srgbClr val="0F0F0F"/>
+              </a:solidFill>
+              <a:latin typeface="Calibri" panose="020F0502020204030204" pitchFamily="34" charset="0"/>
+              <a:cs typeface="Calibri" panose="020F0502020204030204" pitchFamily="34" charset="0"/>
+            </a:endParaRPr>
+          </a:p>
+          <a:p>
+            <a:r>
+              <a:rPr lang="en-US" sz="1400" dirty="0">
+                <a:solidFill>
+                  <a:srgbClr val="0F0F0F"/>
+                </a:solidFill>
+                <a:latin typeface="Calibri" panose="020F0502020204030204" pitchFamily="34" charset="0"/>
+                <a:cs typeface="Calibri" panose="020F0502020204030204" pitchFamily="34" charset="0"/>
+              </a:rPr>
+              <a:t>1-800-426-4261</a:t>
+            </a:r>
+          </a:p>
+          <a:p>
+            <a:endParaRPr lang="en-US" sz="1400" dirty="0">
+              <a:solidFill>
+                <a:srgbClr val="0F0F0F"/>
+              </a:solidFill>
+              <a:latin typeface="Calibri" panose="020F0502020204030204" pitchFamily="34" charset="0"/>
+              <a:cs typeface="Calibri" panose="020F0502020204030204" pitchFamily="34" charset="0"/>
+            </a:endParaRPr>
+          </a:p>
+          <a:p>
+            <a:r>
+              <a:rPr lang="en-US" sz="1400" dirty="0">
+                <a:solidFill>
+                  <a:srgbClr val="0F0F0F"/>
+                </a:solidFill>
+                <a:latin typeface="Calibri" panose="020F0502020204030204" pitchFamily="34" charset="0"/>
+                <a:cs typeface="Calibri" panose="020F0502020204030204" pitchFamily="34" charset="0"/>
+              </a:rPr>
+              <a:t>Parts - </a:t>
+            </a:r>
+            <a:r>
+              <a:rPr lang="en-US" sz="1000" dirty="0">
+                <a:solidFill>
+                  <a:srgbClr val="0F0F0F"/>
+                </a:solidFill>
+                <a:latin typeface="Calibri" panose="020F0502020204030204" pitchFamily="34" charset="0"/>
+                <a:cs typeface="Calibri" panose="020F0502020204030204" pitchFamily="34" charset="0"/>
+                <a:hlinkClick r:id="rId4"/>
+              </a:rPr>
+              <a:t>https://www.parts.andersenwindows.com</a:t>
+            </a:r>
+            <a:endParaRPr lang="en-US" sz="1000" dirty="0">
+              <a:solidFill>
+                <a:srgbClr val="0F0F0F"/>
+              </a:solidFill>
+              <a:latin typeface="Calibri" panose="020F0502020204030204" pitchFamily="34" charset="0"/>
+              <a:cs typeface="Calibri" panose="020F0502020204030204" pitchFamily="34" charset="0"/>
+            </a:endParaRPr>
+          </a:p>
+          <a:p>
+            <a:r>
+              <a:rPr lang="en-US" sz="1400" dirty="0">
+                <a:solidFill>
+                  <a:srgbClr val="0F0F0F"/>
+                </a:solidFill>
+                <a:latin typeface="Calibri" panose="020F0502020204030204" pitchFamily="34" charset="0"/>
+                <a:cs typeface="Calibri" panose="020F0502020204030204" pitchFamily="34" charset="0"/>
+              </a:rPr>
+              <a:t>1-888-888-7020</a:t>
+            </a:r>
+          </a:p>
+          <a:p>
+            <a:endParaRPr lang="en-US" sz="1400" dirty="0">
+              <a:solidFill>
+                <a:srgbClr val="0F0F0F"/>
+              </a:solidFill>
+              <a:latin typeface="Calibri" panose="020F0502020204030204" pitchFamily="34" charset="0"/>
+              <a:cs typeface="Calibri" panose="020F0502020204030204" pitchFamily="34" charset="0"/>
+            </a:endParaRPr>
+          </a:p>
+          <a:p>
+            <a:r>
+              <a:rPr lang="en-US" sz="1400" i="0" dirty="0">
+                <a:solidFill>
+                  <a:srgbClr val="0F0F0F"/>
+                </a:solidFill>
+                <a:effectLst/>
+                <a:latin typeface="Calibri" panose="020F0502020204030204" pitchFamily="34" charset="0"/>
+                <a:cs typeface="Calibri" panose="020F0502020204030204" pitchFamily="34" charset="0"/>
+              </a:rPr>
+              <a:t>need 5/32" hex wrench</a:t>
+            </a:r>
+          </a:p>
+          <a:p>
+            <a:r>
+              <a:rPr lang="en-US" sz="1000" i="0" dirty="0">
+                <a:solidFill>
+                  <a:srgbClr val="0F0F0F"/>
+                </a:solidFill>
+                <a:effectLst/>
+                <a:latin typeface="Calibri" panose="020F0502020204030204" pitchFamily="34" charset="0"/>
+                <a:cs typeface="Calibri" panose="020F0502020204030204" pitchFamily="34" charset="0"/>
+                <a:hlinkClick r:id="rId5"/>
+              </a:rPr>
+              <a:t>https://</a:t>
+            </a:r>
+            <a:r>
+              <a:rPr lang="en-US" sz="1000" i="0" dirty="0" err="1">
+                <a:solidFill>
+                  <a:srgbClr val="0F0F0F"/>
+                </a:solidFill>
+                <a:effectLst/>
+                <a:latin typeface="Calibri" panose="020F0502020204030204" pitchFamily="34" charset="0"/>
+                <a:cs typeface="Calibri" panose="020F0502020204030204" pitchFamily="34" charset="0"/>
+                <a:hlinkClick r:id="rId5"/>
+              </a:rPr>
+              <a:t>parts.andersenwindows.com</a:t>
+            </a:r>
+            <a:r>
+              <a:rPr lang="en-US" sz="1000" i="0" dirty="0">
+                <a:solidFill>
+                  <a:srgbClr val="0F0F0F"/>
+                </a:solidFill>
+                <a:effectLst/>
+                <a:latin typeface="Calibri" panose="020F0502020204030204" pitchFamily="34" charset="0"/>
+                <a:cs typeface="Calibri" panose="020F0502020204030204" pitchFamily="34" charset="0"/>
+                <a:hlinkClick r:id="rId5"/>
+              </a:rPr>
+              <a:t>/detail_2579045__d_fwh_hng.html</a:t>
+            </a:r>
+            <a:r>
+              <a:rPr lang="en-US" sz="1400" dirty="0">
+                <a:solidFill>
+                  <a:srgbClr val="0F0F0F"/>
+                </a:solidFill>
+                <a:latin typeface="Calibri" panose="020F0502020204030204" pitchFamily="34" charset="0"/>
+                <a:cs typeface="Calibri" panose="020F0502020204030204" pitchFamily="34" charset="0"/>
+              </a:rPr>
+              <a:t> </a:t>
+            </a:r>
+            <a:endParaRPr lang="en-US" sz="1400" i="0" dirty="0">
+              <a:solidFill>
+                <a:srgbClr val="0F0F0F"/>
+              </a:solidFill>
+              <a:effectLst/>
+              <a:latin typeface="Calibri" panose="020F0502020204030204" pitchFamily="34" charset="0"/>
+              <a:cs typeface="Calibri" panose="020F0502020204030204" pitchFamily="34" charset="0"/>
+            </a:endParaRPr>
+          </a:p>
+          <a:p>
+            <a:endParaRPr lang="en-US" sz="1400" dirty="0">
+              <a:solidFill>
+                <a:srgbClr val="0F0F0F"/>
+              </a:solidFill>
+              <a:latin typeface="Calibri" panose="020F0502020204030204" pitchFamily="34" charset="0"/>
+              <a:cs typeface="Calibri" panose="020F0502020204030204" pitchFamily="34" charset="0"/>
+            </a:endParaRPr>
+          </a:p>
+          <a:p>
+            <a:r>
+              <a:rPr lang="en-US" sz="1400" i="0" dirty="0">
+                <a:solidFill>
+                  <a:srgbClr val="0F0F0F"/>
+                </a:solidFill>
+                <a:effectLst/>
+                <a:latin typeface="Calibri" panose="020F0502020204030204" pitchFamily="34" charset="0"/>
+                <a:cs typeface="Calibri" panose="020F0502020204030204" pitchFamily="34" charset="0"/>
+              </a:rPr>
+              <a:t>Adjusting A </a:t>
+            </a:r>
+            <a:r>
+              <a:rPr lang="en-US" sz="1400" i="0" dirty="0" err="1">
+                <a:solidFill>
+                  <a:srgbClr val="0F0F0F"/>
+                </a:solidFill>
+                <a:effectLst/>
+                <a:latin typeface="Calibri" panose="020F0502020204030204" pitchFamily="34" charset="0"/>
+                <a:cs typeface="Calibri" panose="020F0502020204030204" pitchFamily="34" charset="0"/>
+              </a:rPr>
+              <a:t>Frenchwood</a:t>
+            </a:r>
+            <a:r>
+              <a:rPr lang="en-US" sz="1400" i="0" dirty="0">
+                <a:solidFill>
+                  <a:srgbClr val="0F0F0F"/>
+                </a:solidFill>
+                <a:effectLst/>
+                <a:latin typeface="Calibri" panose="020F0502020204030204" pitchFamily="34" charset="0"/>
+                <a:cs typeface="Calibri" panose="020F0502020204030204" pitchFamily="34" charset="0"/>
+              </a:rPr>
+              <a:t> Inswing Patio Door (Pre-2005)</a:t>
+            </a:r>
+          </a:p>
+          <a:p>
+            <a:r>
+              <a:rPr lang="en-US" sz="1000" i="0" dirty="0">
+                <a:solidFill>
+                  <a:srgbClr val="0F0F0F"/>
+                </a:solidFill>
+                <a:effectLst/>
+                <a:latin typeface="Calibri" panose="020F0502020204030204" pitchFamily="34" charset="0"/>
+                <a:cs typeface="Calibri" panose="020F0502020204030204" pitchFamily="34" charset="0"/>
+                <a:hlinkClick r:id="rId6"/>
+              </a:rPr>
+              <a:t>https://</a:t>
+            </a:r>
+            <a:r>
+              <a:rPr lang="en-US" sz="1000" i="0" dirty="0" err="1">
+                <a:solidFill>
+                  <a:srgbClr val="0F0F0F"/>
+                </a:solidFill>
+                <a:effectLst/>
+                <a:latin typeface="Calibri" panose="020F0502020204030204" pitchFamily="34" charset="0"/>
+                <a:cs typeface="Calibri" panose="020F0502020204030204" pitchFamily="34" charset="0"/>
+                <a:hlinkClick r:id="rId6"/>
+              </a:rPr>
+              <a:t>www.youtube.com</a:t>
+            </a:r>
+            <a:r>
+              <a:rPr lang="en-US" sz="1000" i="0" dirty="0">
+                <a:solidFill>
+                  <a:srgbClr val="0F0F0F"/>
+                </a:solidFill>
+                <a:effectLst/>
+                <a:latin typeface="Calibri" panose="020F0502020204030204" pitchFamily="34" charset="0"/>
+                <a:cs typeface="Calibri" panose="020F0502020204030204" pitchFamily="34" charset="0"/>
+                <a:hlinkClick r:id="rId6"/>
+              </a:rPr>
+              <a:t>/</a:t>
+            </a:r>
+            <a:r>
+              <a:rPr lang="en-US" sz="1000" i="0" dirty="0" err="1">
+                <a:solidFill>
+                  <a:srgbClr val="0F0F0F"/>
+                </a:solidFill>
+                <a:effectLst/>
+                <a:latin typeface="Calibri" panose="020F0502020204030204" pitchFamily="34" charset="0"/>
+                <a:cs typeface="Calibri" panose="020F0502020204030204" pitchFamily="34" charset="0"/>
+                <a:hlinkClick r:id="rId6"/>
+              </a:rPr>
+              <a:t>watch?v</a:t>
+            </a:r>
+            <a:r>
+              <a:rPr lang="en-US" sz="1000" i="0" dirty="0">
+                <a:solidFill>
+                  <a:srgbClr val="0F0F0F"/>
+                </a:solidFill>
+                <a:effectLst/>
+                <a:latin typeface="Calibri" panose="020F0502020204030204" pitchFamily="34" charset="0"/>
+                <a:cs typeface="Calibri" panose="020F0502020204030204" pitchFamily="34" charset="0"/>
+                <a:hlinkClick r:id="rId6"/>
+              </a:rPr>
+              <a:t>=3jjh4aQmQ3Q</a:t>
+            </a:r>
+            <a:endParaRPr lang="en-US" sz="1000" i="0" dirty="0">
+              <a:solidFill>
+                <a:srgbClr val="0F0F0F"/>
+              </a:solidFill>
+              <a:effectLst/>
+              <a:latin typeface="Calibri" panose="020F0502020204030204" pitchFamily="34" charset="0"/>
+              <a:cs typeface="Calibri" panose="020F0502020204030204" pitchFamily="34" charset="0"/>
+            </a:endParaRPr>
+          </a:p>
+          <a:p>
+            <a:endParaRPr lang="en-US" sz="1400" i="0" dirty="0">
+              <a:solidFill>
+                <a:srgbClr val="0F0F0F"/>
+              </a:solidFill>
+              <a:effectLst/>
+              <a:latin typeface="Calibri" panose="020F0502020204030204" pitchFamily="34" charset="0"/>
+              <a:cs typeface="Calibri" panose="020F0502020204030204" pitchFamily="34" charset="0"/>
+            </a:endParaRPr>
+          </a:p>
+          <a:p>
+            <a:r>
+              <a:rPr lang="en-US" sz="1400" i="0" dirty="0">
+                <a:solidFill>
+                  <a:srgbClr val="0F0F0F"/>
+                </a:solidFill>
+                <a:effectLst/>
+                <a:latin typeface="Calibri" panose="020F0502020204030204" pitchFamily="34" charset="0"/>
+                <a:cs typeface="Calibri" panose="020F0502020204030204" pitchFamily="34" charset="0"/>
+              </a:rPr>
+              <a:t>Adjusting an Anderson Door that Rubs</a:t>
+            </a:r>
+          </a:p>
+          <a:p>
+            <a:r>
+              <a:rPr lang="en-US" sz="1000" i="0" dirty="0">
+                <a:solidFill>
+                  <a:srgbClr val="0F0F0F"/>
+                </a:solidFill>
+                <a:effectLst/>
+                <a:latin typeface="Calibri" panose="020F0502020204030204" pitchFamily="34" charset="0"/>
+                <a:cs typeface="Calibri" panose="020F0502020204030204" pitchFamily="34" charset="0"/>
+                <a:hlinkClick r:id="rId7"/>
+              </a:rPr>
+              <a:t>https://www.youtube.com/watch?v=sBZzJ-IhidI</a:t>
+            </a:r>
+            <a:endParaRPr lang="en-US" sz="1000" dirty="0">
+              <a:solidFill>
+                <a:srgbClr val="0F0F0F"/>
+              </a:solidFill>
+              <a:latin typeface="Calibri" panose="020F0502020204030204" pitchFamily="34" charset="0"/>
+              <a:cs typeface="Calibri" panose="020F0502020204030204" pitchFamily="34" charset="0"/>
+            </a:endParaRPr>
+          </a:p>
+        </p:txBody>
+      </p:sp>
+      <p:pic>
+        <p:nvPicPr>
+          <p:cNvPr id="1026" name="Picture 2" descr="Adjusting A Frenchwood Inswing Patio Door (Pre-2005) | Andersen Windows -  YouTube">
+            <a:extLst>
+              <a:ext uri="{FF2B5EF4-FFF2-40B4-BE49-F238E27FC236}">
+                <a16:creationId xmlns:a16="http://schemas.microsoft.com/office/drawing/2014/main" id="{CEF30CB7-0696-B0FB-3B7F-A320EE23F47E}"/>
+              </a:ext>
+            </a:extLst>
+          </p:cNvPr>
+          <p:cNvPicPr>
+            <a:picLocks noChangeAspect="1" noChangeArrowheads="1"/>
+          </p:cNvPicPr>
+          <p:nvPr/>
+        </p:nvPicPr>
+        <p:blipFill>
+          <a:blip r:embed="rId8" cstate="email">
+            <a:extLst>
+              <a:ext uri="{28A0092B-C50C-407E-A947-70E740481C1C}">
+                <a14:useLocalDpi xmlns:a14="http://schemas.microsoft.com/office/drawing/2010/main"/>
+              </a:ext>
+            </a:extLst>
+          </a:blip>
+          <a:srcRect/>
+          <a:stretch>
+            <a:fillRect/>
+          </a:stretch>
+        </p:blipFill>
+        <p:spPr bwMode="auto">
+          <a:xfrm>
+            <a:off x="7260663" y="719966"/>
+            <a:ext cx="4734560" cy="2663190"/>
+          </a:xfrm>
+          <a:prstGeom prst="rect">
+            <a:avLst/>
+          </a:prstGeom>
+          <a:noFill/>
+          <a:ln>
+            <a:solidFill>
+              <a:srgbClr val="FF0000"/>
+            </a:solidFill>
+          </a:ln>
+          <a:extLst>
+            <a:ext uri="{909E8E84-426E-40DD-AFC4-6F175D3DCCD1}">
+              <a14:hiddenFill xmlns:a14="http://schemas.microsoft.com/office/drawing/2010/main">
+                <a:solidFill>
+                  <a:srgbClr val="FFFFFF"/>
+                </a:solidFill>
+              </a14:hiddenFill>
+            </a:ext>
+          </a:extLst>
+        </p:spPr>
+      </p:pic>
+      <p:pic>
+        <p:nvPicPr>
+          <p:cNvPr id="1028" name="Picture 4" descr="Andersen Patio Door Hinge 1992-2005 - Left - Oil Rubbed Bronze - 2579574  7165-12">
+            <a:extLst>
+              <a:ext uri="{FF2B5EF4-FFF2-40B4-BE49-F238E27FC236}">
+                <a16:creationId xmlns:a16="http://schemas.microsoft.com/office/drawing/2014/main" id="{744BF381-20B7-61FD-1A28-C6AFF44C3870}"/>
+              </a:ext>
+            </a:extLst>
+          </p:cNvPr>
+          <p:cNvPicPr>
+            <a:picLocks noChangeAspect="1" noChangeArrowheads="1"/>
+          </p:cNvPicPr>
+          <p:nvPr/>
+        </p:nvPicPr>
+        <p:blipFill rotWithShape="1">
+          <a:blip r:embed="rId9" cstate="email">
+            <a:extLst>
+              <a:ext uri="{28A0092B-C50C-407E-A947-70E740481C1C}">
+                <a14:useLocalDpi xmlns:a14="http://schemas.microsoft.com/office/drawing/2010/main"/>
+              </a:ext>
+            </a:extLst>
+          </a:blip>
+          <a:srcRect/>
+          <a:stretch/>
+        </p:blipFill>
+        <p:spPr bwMode="auto">
+          <a:xfrm>
+            <a:off x="172720" y="3917950"/>
+            <a:ext cx="2770470" cy="2797810"/>
+          </a:xfrm>
+          <a:prstGeom prst="rect">
+            <a:avLst/>
+          </a:prstGeom>
+          <a:noFill/>
+          <a:ln>
+            <a:solidFill>
+              <a:srgbClr val="FF0000"/>
+            </a:solidFill>
+          </a:ln>
+          <a:extLst>
+            <a:ext uri="{909E8E84-426E-40DD-AFC4-6F175D3DCCD1}">
+              <a14:hiddenFill xmlns:a14="http://schemas.microsoft.com/office/drawing/2010/main">
+                <a:solidFill>
+                  <a:srgbClr val="FFFFFF"/>
+                </a:solidFill>
+              </a14:hiddenFill>
+            </a:ext>
+          </a:extLst>
+        </p:spPr>
+      </p:pic>
+      <p:sp>
+        <p:nvSpPr>
+          <p:cNvPr id="4" name="TextBox 3">
+            <a:extLst>
+              <a:ext uri="{FF2B5EF4-FFF2-40B4-BE49-F238E27FC236}">
+                <a16:creationId xmlns:a16="http://schemas.microsoft.com/office/drawing/2014/main" id="{DD4394FC-D1D9-F361-3B76-4BF1E090F672}"/>
+              </a:ext>
+            </a:extLst>
+          </p:cNvPr>
+          <p:cNvSpPr txBox="1"/>
+          <p:nvPr/>
+        </p:nvSpPr>
+        <p:spPr>
+          <a:xfrm>
+            <a:off x="4331371" y="719966"/>
+            <a:ext cx="2770470" cy="1815882"/>
+          </a:xfrm>
+          <a:prstGeom prst="rect">
+            <a:avLst/>
+          </a:prstGeom>
+          <a:solidFill>
+            <a:schemeClr val="accent4">
+              <a:lumMod val="20000"/>
+              <a:lumOff val="80000"/>
+            </a:schemeClr>
+          </a:solidFill>
+          <a:ln>
+            <a:solidFill>
+              <a:srgbClr val="FF0000"/>
+            </a:solidFill>
+          </a:ln>
+        </p:spPr>
+        <p:txBody>
+          <a:bodyPr wrap="square" rtlCol="0">
+            <a:spAutoFit/>
+          </a:bodyPr>
+          <a:lstStyle/>
+          <a:p>
+            <a:r>
+              <a:rPr lang="en-US" sz="1400" i="0" dirty="0">
+                <a:solidFill>
+                  <a:srgbClr val="0F0F0F"/>
+                </a:solidFill>
+                <a:effectLst/>
+                <a:latin typeface="Calibri" panose="020F0502020204030204" pitchFamily="34" charset="0"/>
+                <a:cs typeface="Calibri" panose="020F0502020204030204" pitchFamily="34" charset="0"/>
+              </a:rPr>
+              <a:t>There are 3 hex-head screws. The regulation is done by the central one.</a:t>
+            </a:r>
+          </a:p>
+          <a:p>
+            <a:r>
+              <a:rPr lang="en-US" sz="1400" dirty="0">
+                <a:solidFill>
+                  <a:srgbClr val="0F0F0F"/>
+                </a:solidFill>
+                <a:latin typeface="Calibri" panose="020F0502020204030204" pitchFamily="34" charset="0"/>
+                <a:cs typeface="Calibri" panose="020F0502020204030204" pitchFamily="34" charset="0"/>
+              </a:rPr>
+              <a:t>1. loosen the top and bottom</a:t>
+            </a:r>
+          </a:p>
+          <a:p>
+            <a:r>
+              <a:rPr lang="en-US" sz="1400" i="0" dirty="0">
+                <a:solidFill>
+                  <a:srgbClr val="0F0F0F"/>
+                </a:solidFill>
+                <a:effectLst/>
+                <a:latin typeface="Calibri" panose="020F0502020204030204" pitchFamily="34" charset="0"/>
+                <a:cs typeface="Calibri" panose="020F0502020204030204" pitchFamily="34" charset="0"/>
+              </a:rPr>
+              <a:t>2. regulate the middle (screw-in or out to decrease or increase the opening)</a:t>
+            </a:r>
+          </a:p>
+          <a:p>
+            <a:r>
+              <a:rPr lang="en-US" sz="1400" dirty="0">
+                <a:solidFill>
+                  <a:srgbClr val="0F0F0F"/>
+                </a:solidFill>
+                <a:latin typeface="Calibri" panose="020F0502020204030204" pitchFamily="34" charset="0"/>
+                <a:cs typeface="Calibri" panose="020F0502020204030204" pitchFamily="34" charset="0"/>
+              </a:rPr>
+              <a:t>3. tighten the top and bottom</a:t>
+            </a:r>
+          </a:p>
+        </p:txBody>
+      </p:sp>
+      <p:pic>
+        <p:nvPicPr>
+          <p:cNvPr id="5" name="Picture 4">
+            <a:extLst>
+              <a:ext uri="{FF2B5EF4-FFF2-40B4-BE49-F238E27FC236}">
+                <a16:creationId xmlns:a16="http://schemas.microsoft.com/office/drawing/2014/main" id="{B0EF3AE3-0CC4-EF6E-4DBF-2E113DCE69FF}"/>
+              </a:ext>
+            </a:extLst>
+          </p:cNvPr>
+          <p:cNvPicPr>
+            <a:picLocks noChangeAspect="1"/>
+          </p:cNvPicPr>
+          <p:nvPr/>
+        </p:nvPicPr>
+        <p:blipFill>
+          <a:blip r:embed="rId10" cstate="email">
+            <a:extLst>
+              <a:ext uri="{28A0092B-C50C-407E-A947-70E740481C1C}">
+                <a14:useLocalDpi xmlns:a14="http://schemas.microsoft.com/office/drawing/2010/main"/>
+              </a:ext>
+            </a:extLst>
+          </a:blip>
+          <a:stretch>
+            <a:fillRect/>
+          </a:stretch>
+        </p:blipFill>
+        <p:spPr>
+          <a:xfrm>
+            <a:off x="9830134" y="3552190"/>
+            <a:ext cx="1926405" cy="2940050"/>
+          </a:xfrm>
+          <a:prstGeom prst="rect">
+            <a:avLst/>
+          </a:prstGeom>
+        </p:spPr>
+      </p:pic>
+      <p:sp>
+        <p:nvSpPr>
+          <p:cNvPr id="8" name="TextBox 7">
+            <a:extLst>
+              <a:ext uri="{FF2B5EF4-FFF2-40B4-BE49-F238E27FC236}">
+                <a16:creationId xmlns:a16="http://schemas.microsoft.com/office/drawing/2014/main" id="{7737935D-E707-14BF-B756-82C276AA6A2D}"/>
+              </a:ext>
+            </a:extLst>
+          </p:cNvPr>
+          <p:cNvSpPr txBox="1"/>
+          <p:nvPr/>
+        </p:nvSpPr>
+        <p:spPr>
+          <a:xfrm>
+            <a:off x="6353210" y="4865246"/>
+            <a:ext cx="3156549" cy="523220"/>
+          </a:xfrm>
+          <a:prstGeom prst="rect">
+            <a:avLst/>
+          </a:prstGeom>
+          <a:solidFill>
+            <a:schemeClr val="accent4">
+              <a:lumMod val="20000"/>
+              <a:lumOff val="80000"/>
+            </a:schemeClr>
+          </a:solidFill>
+          <a:ln>
+            <a:solidFill>
+              <a:srgbClr val="FF0000"/>
+            </a:solidFill>
+          </a:ln>
+        </p:spPr>
+        <p:txBody>
+          <a:bodyPr wrap="square" rtlCol="0">
+            <a:spAutoFit/>
+          </a:bodyPr>
+          <a:lstStyle/>
+          <a:p>
+            <a:r>
+              <a:rPr lang="en-US" sz="1400" i="0" dirty="0">
+                <a:solidFill>
+                  <a:srgbClr val="0F0F0F"/>
+                </a:solidFill>
+                <a:effectLst/>
+                <a:latin typeface="Calibri" panose="020F0502020204030204" pitchFamily="34" charset="0"/>
+                <a:cs typeface="Calibri" panose="020F0502020204030204" pitchFamily="34" charset="0"/>
+              </a:rPr>
+              <a:t>There is also up/down adjustment of the hinge – screw-in/out to move up/down</a:t>
+            </a:r>
+            <a:endParaRPr lang="en-US" sz="1400" dirty="0">
+              <a:solidFill>
+                <a:srgbClr val="0F0F0F"/>
+              </a:solidFill>
+              <a:latin typeface="Calibri" panose="020F0502020204030204" pitchFamily="34" charset="0"/>
+              <a:cs typeface="Calibri" panose="020F0502020204030204" pitchFamily="34" charset="0"/>
+            </a:endParaRPr>
+          </a:p>
+        </p:txBody>
+      </p:sp>
+    </p:spTree>
+    <p:extLst>
+      <p:ext uri="{BB962C8B-B14F-4D97-AF65-F5344CB8AC3E}">
+        <p14:creationId xmlns:p14="http://schemas.microsoft.com/office/powerpoint/2010/main" val="1053730920"/>
       </p:ext>
     </p:extLst>
   </p:cSld>

--- a/hinges.pptx
+++ b/hinges.pptx
@@ -199,7 +199,7 @@
           <a:p>
             <a:fld id="{D2843BDE-B8C0-934E-9704-CBA3B88C1FB8}" type="datetimeFigureOut">
               <a:rPr lang="en-US" smtClean="0"/>
-              <a:t>2/10/24</a:t>
+              <a:t>5/25/24</a:t>
             </a:fld>
             <a:endParaRPr lang="en-US"/>
           </a:p>
@@ -888,7 +888,7 @@
           <a:lstStyle/>
           <a:p>
             <a:fld id="{5F491023-0B0A-7041-9F06-D25A50EF063B}" type="datetimeFigureOut">
-              <a:t>2/10/24</a:t>
+              <a:t>5/25/24</a:t>
             </a:fld>
             <a:endParaRPr lang="en-US"/>
           </a:p>
@@ -1084,7 +1084,7 @@
           <a:lstStyle/>
           <a:p>
             <a:fld id="{5F491023-0B0A-7041-9F06-D25A50EF063B}" type="datetimeFigureOut">
-              <a:t>2/10/24</a:t>
+              <a:t>5/25/24</a:t>
             </a:fld>
             <a:endParaRPr lang="en-US"/>
           </a:p>
@@ -1290,7 +1290,7 @@
           <a:lstStyle/>
           <a:p>
             <a:fld id="{5F491023-0B0A-7041-9F06-D25A50EF063B}" type="datetimeFigureOut">
-              <a:t>2/10/24</a:t>
+              <a:t>5/25/24</a:t>
             </a:fld>
             <a:endParaRPr lang="en-US"/>
           </a:p>
@@ -1486,7 +1486,7 @@
           <a:lstStyle/>
           <a:p>
             <a:fld id="{5F491023-0B0A-7041-9F06-D25A50EF063B}" type="datetimeFigureOut">
-              <a:t>2/10/24</a:t>
+              <a:t>5/25/24</a:t>
             </a:fld>
             <a:endParaRPr lang="en-US"/>
           </a:p>
@@ -1759,7 +1759,7 @@
           <a:lstStyle/>
           <a:p>
             <a:fld id="{5F491023-0B0A-7041-9F06-D25A50EF063B}" type="datetimeFigureOut">
-              <a:t>2/10/24</a:t>
+              <a:t>5/25/24</a:t>
             </a:fld>
             <a:endParaRPr lang="en-US"/>
           </a:p>
@@ -2022,7 +2022,7 @@
           <a:lstStyle/>
           <a:p>
             <a:fld id="{5F491023-0B0A-7041-9F06-D25A50EF063B}" type="datetimeFigureOut">
-              <a:t>2/10/24</a:t>
+              <a:t>5/25/24</a:t>
             </a:fld>
             <a:endParaRPr lang="en-US"/>
           </a:p>
@@ -2432,7 +2432,7 @@
           <a:lstStyle/>
           <a:p>
             <a:fld id="{5F491023-0B0A-7041-9F06-D25A50EF063B}" type="datetimeFigureOut">
-              <a:t>2/10/24</a:t>
+              <a:t>5/25/24</a:t>
             </a:fld>
             <a:endParaRPr lang="en-US"/>
           </a:p>
@@ -2571,7 +2571,7 @@
           <a:lstStyle/>
           <a:p>
             <a:fld id="{5F491023-0B0A-7041-9F06-D25A50EF063B}" type="datetimeFigureOut">
-              <a:t>2/10/24</a:t>
+              <a:t>5/25/24</a:t>
             </a:fld>
             <a:endParaRPr lang="en-US"/>
           </a:p>
@@ -2682,7 +2682,7 @@
           <a:lstStyle/>
           <a:p>
             <a:fld id="{5F491023-0B0A-7041-9F06-D25A50EF063B}" type="datetimeFigureOut">
-              <a:t>2/10/24</a:t>
+              <a:t>5/25/24</a:t>
             </a:fld>
             <a:endParaRPr lang="en-US"/>
           </a:p>
@@ -2991,7 +2991,7 @@
           <a:lstStyle/>
           <a:p>
             <a:fld id="{5F491023-0B0A-7041-9F06-D25A50EF063B}" type="datetimeFigureOut">
-              <a:t>2/10/24</a:t>
+              <a:t>5/25/24</a:t>
             </a:fld>
             <a:endParaRPr lang="en-US"/>
           </a:p>
@@ -3277,7 +3277,7 @@
           <a:lstStyle/>
           <a:p>
             <a:fld id="{5F491023-0B0A-7041-9F06-D25A50EF063B}" type="datetimeFigureOut">
-              <a:t>2/10/24</a:t>
+              <a:t>5/25/24</a:t>
             </a:fld>
             <a:endParaRPr lang="en-US"/>
           </a:p>
@@ -3516,7 +3516,7 @@
           </a:lstStyle>
           <a:p>
             <a:fld id="{5F491023-0B0A-7041-9F06-D25A50EF063B}" type="datetimeFigureOut">
-              <a:t>2/10/24</a:t>
+              <a:t>5/25/24</a:t>
             </a:fld>
             <a:endParaRPr lang="en-US"/>
           </a:p>
@@ -4425,6 +4425,52 @@
       </p:grpSpPr>
       <p:sp>
         <p:nvSpPr>
+          <p:cNvPr id="10" name="Rectangle 9">
+            <a:extLst>
+              <a:ext uri="{FF2B5EF4-FFF2-40B4-BE49-F238E27FC236}">
+                <a16:creationId xmlns:a16="http://schemas.microsoft.com/office/drawing/2014/main" id="{C22ECB98-03EC-DBE0-F1B4-50DE841F02D6}"/>
+              </a:ext>
+            </a:extLst>
+          </p:cNvPr>
+          <p:cNvSpPr/>
+          <p:nvPr/>
+        </p:nvSpPr>
+        <p:spPr>
+          <a:xfrm>
+            <a:off x="3448527" y="4657133"/>
+            <a:ext cx="2796139" cy="1548474"/>
+          </a:xfrm>
+          <a:prstGeom prst="rect">
+            <a:avLst/>
+          </a:prstGeom>
+        </p:spPr>
+        <p:style>
+          <a:lnRef idx="2">
+            <a:schemeClr val="accent1">
+              <a:shade val="15000"/>
+            </a:schemeClr>
+          </a:lnRef>
+          <a:fillRef idx="1">
+            <a:schemeClr val="accent1"/>
+          </a:fillRef>
+          <a:effectRef idx="0">
+            <a:schemeClr val="accent1"/>
+          </a:effectRef>
+          <a:fontRef idx="minor">
+            <a:schemeClr val="lt1"/>
+          </a:fontRef>
+        </p:style>
+        <p:txBody>
+          <a:bodyPr rtlCol="0" anchor="ctr"/>
+          <a:lstStyle/>
+          <a:p>
+            <a:pPr algn="ctr"/>
+            <a:endParaRPr lang="en-US"/>
+          </a:p>
+        </p:txBody>
+      </p:sp>
+      <p:sp>
+        <p:nvSpPr>
           <p:cNvPr id="2" name="TextBox 1">
             <a:extLst>
               <a:ext uri="{FF2B5EF4-FFF2-40B4-BE49-F238E27FC236}">
@@ -4490,7 +4536,7 @@
         <p:spPr>
           <a:xfrm>
             <a:off x="57749" y="486507"/>
-            <a:ext cx="4114800" cy="3354765"/>
+            <a:ext cx="3986217" cy="3354765"/>
           </a:xfrm>
           <a:prstGeom prst="rect">
             <a:avLst/>
@@ -4625,7 +4671,7 @@
                 <a:latin typeface="Calibri" panose="020F0502020204030204" pitchFamily="34" charset="0"/>
                 <a:cs typeface="Calibri" panose="020F0502020204030204" pitchFamily="34" charset="0"/>
               </a:rPr>
-              <a:t>need 5/32" hex wrench</a:t>
+              <a:t>need 5/32" hex wrench (=3.97mm)</a:t>
             </a:r>
           </a:p>
           <a:p>
@@ -4923,7 +4969,7 @@
         </p:blipFill>
         <p:spPr bwMode="auto">
           <a:xfrm>
-            <a:off x="172720" y="3917950"/>
+            <a:off x="56809" y="3995224"/>
             <a:ext cx="2770470" cy="2797810"/>
           </a:xfrm>
           <a:prstGeom prst="rect">
@@ -5085,8 +5131,8 @@
         </p:nvSpPr>
         <p:spPr>
           <a:xfrm>
-            <a:off x="6353210" y="4865246"/>
-            <a:ext cx="3156549" cy="523220"/>
+            <a:off x="6946925" y="4808643"/>
+            <a:ext cx="2770470" cy="738664"/>
           </a:xfrm>
           <a:prstGeom prst="rect">
             <a:avLst/>
@@ -5118,7 +5164,20 @@
                 <a:latin typeface="Calibri" panose="020F0502020204030204" pitchFamily="34" charset="0"/>
                 <a:cs typeface="Calibri" panose="020F0502020204030204" pitchFamily="34" charset="0"/>
               </a:rPr>
-              <a:t>There is also up/down adjustment of the hinge – screw-in/out to move up/down</a:t>
+              <a:t>There is also up/down adjustment of the hinge:</a:t>
+            </a:r>
+          </a:p>
+          <a:p>
+            <a:r>
+              <a:rPr lang="en-US" sz="1400" i="0" dirty="0">
+                <a:solidFill>
+                  <a:srgbClr val="0F0F0F"/>
+                </a:solidFill>
+                <a:effectLst/>
+                <a:latin typeface="Calibri" panose="020F0502020204030204" pitchFamily="34" charset="0"/>
+                <a:cs typeface="Calibri" panose="020F0502020204030204" pitchFamily="34" charset="0"/>
+              </a:rPr>
+              <a:t>screw-in/out to move up/down</a:t>
             </a:r>
             <a:endParaRPr lang="en-US" sz="1400" dirty="0">
               <a:solidFill>
@@ -5130,6 +5189,177 @@
           </a:p>
         </p:txBody>
       </p:sp>
+      <p:sp>
+        <p:nvSpPr>
+          <p:cNvPr id="6" name="TextBox 5">
+            <a:extLst>
+              <a:ext uri="{FF2B5EF4-FFF2-40B4-BE49-F238E27FC236}">
+                <a16:creationId xmlns:a16="http://schemas.microsoft.com/office/drawing/2014/main" id="{7B592990-D1BA-C296-2298-1BF166D148B6}"/>
+              </a:ext>
+            </a:extLst>
+          </p:cNvPr>
+          <p:cNvSpPr txBox="1"/>
+          <p:nvPr/>
+        </p:nvSpPr>
+        <p:spPr>
+          <a:xfrm>
+            <a:off x="3572388" y="4760605"/>
+            <a:ext cx="2559379" cy="523220"/>
+          </a:xfrm>
+          <a:prstGeom prst="rect">
+            <a:avLst/>
+          </a:prstGeom>
+          <a:solidFill>
+            <a:schemeClr val="accent4">
+              <a:lumMod val="20000"/>
+              <a:lumOff val="80000"/>
+            </a:schemeClr>
+          </a:solidFill>
+          <a:ln>
+            <a:solidFill>
+              <a:srgbClr val="FF0000"/>
+            </a:solidFill>
+          </a:ln>
+        </p:spPr>
+        <p:txBody>
+          <a:bodyPr wrap="square" rtlCol="0">
+            <a:spAutoFit/>
+          </a:bodyPr>
+          <a:lstStyle/>
+          <a:p>
+            <a:r>
+              <a:rPr lang="en-US" sz="1400" i="0" dirty="0">
+                <a:solidFill>
+                  <a:srgbClr val="0F0F0F"/>
+                </a:solidFill>
+                <a:effectLst/>
+                <a:latin typeface="Calibri" panose="020F0502020204030204" pitchFamily="34" charset="0"/>
+                <a:cs typeface="Calibri" panose="020F0502020204030204" pitchFamily="34" charset="0"/>
+              </a:rPr>
+              <a:t>size of hex wrenches and nuts is measured "Across </a:t>
+            </a:r>
+            <a:r>
+              <a:rPr lang="en-US" sz="1400" dirty="0">
+                <a:solidFill>
+                  <a:srgbClr val="0F0F0F"/>
+                </a:solidFill>
+                <a:latin typeface="Calibri" panose="020F0502020204030204" pitchFamily="34" charset="0"/>
+                <a:cs typeface="Calibri" panose="020F0502020204030204" pitchFamily="34" charset="0"/>
+              </a:rPr>
+              <a:t>F</a:t>
+            </a:r>
+            <a:r>
+              <a:rPr lang="en-US" sz="1400" i="0" dirty="0">
+                <a:solidFill>
+                  <a:srgbClr val="0F0F0F"/>
+                </a:solidFill>
+                <a:effectLst/>
+                <a:latin typeface="Calibri" panose="020F0502020204030204" pitchFamily="34" charset="0"/>
+                <a:cs typeface="Calibri" panose="020F0502020204030204" pitchFamily="34" charset="0"/>
+              </a:rPr>
+              <a:t>lats" (AF). </a:t>
+            </a:r>
+            <a:endParaRPr lang="en-US" sz="1400" dirty="0">
+              <a:solidFill>
+                <a:srgbClr val="0F0F0F"/>
+              </a:solidFill>
+              <a:latin typeface="Calibri" panose="020F0502020204030204" pitchFamily="34" charset="0"/>
+              <a:cs typeface="Calibri" panose="020F0502020204030204" pitchFamily="34" charset="0"/>
+            </a:endParaRPr>
+          </a:p>
+        </p:txBody>
+      </p:sp>
+      <p:pic>
+        <p:nvPicPr>
+          <p:cNvPr id="7" name="Picture 2" descr="Wrench Openings Table">
+            <a:extLst>
+              <a:ext uri="{FF2B5EF4-FFF2-40B4-BE49-F238E27FC236}">
+                <a16:creationId xmlns:a16="http://schemas.microsoft.com/office/drawing/2014/main" id="{6E5751B3-81D1-2831-CBE0-9AA39DB6D945}"/>
+              </a:ext>
+            </a:extLst>
+          </p:cNvPr>
+          <p:cNvPicPr>
+            <a:picLocks noChangeAspect="1" noChangeArrowheads="1"/>
+          </p:cNvPicPr>
+          <p:nvPr/>
+        </p:nvPicPr>
+        <p:blipFill rotWithShape="1">
+          <a:blip r:embed="rId11" cstate="email">
+            <a:extLst>
+              <a:ext uri="{28A0092B-C50C-407E-A947-70E740481C1C}">
+                <a14:useLocalDpi xmlns:a14="http://schemas.microsoft.com/office/drawing/2010/main"/>
+              </a:ext>
+            </a:extLst>
+          </a:blip>
+          <a:srcRect r="38959" b="13530"/>
+          <a:stretch/>
+        </p:blipFill>
+        <p:spPr bwMode="auto">
+          <a:xfrm>
+            <a:off x="3582263" y="5344667"/>
+            <a:ext cx="1167035" cy="738665"/>
+          </a:xfrm>
+          <a:prstGeom prst="rect">
+            <a:avLst/>
+          </a:prstGeom>
+          <a:noFill/>
+          <a:ln>
+            <a:solidFill>
+              <a:srgbClr val="FF0000"/>
+            </a:solidFill>
+          </a:ln>
+          <a:extLst>
+            <a:ext uri="{909E8E84-426E-40DD-AFC4-6F175D3DCCD1}">
+              <a14:hiddenFill xmlns:a14="http://schemas.microsoft.com/office/drawing/2010/main">
+                <a:solidFill>
+                  <a:srgbClr val="FFFFFF"/>
+                </a:solidFill>
+              </a14:hiddenFill>
+            </a:ext>
+          </a:extLst>
+        </p:spPr>
+      </p:pic>
+      <p:pic>
+        <p:nvPicPr>
+          <p:cNvPr id="9" name="Picture 8">
+            <a:extLst>
+              <a:ext uri="{FF2B5EF4-FFF2-40B4-BE49-F238E27FC236}">
+                <a16:creationId xmlns:a16="http://schemas.microsoft.com/office/drawing/2014/main" id="{89510814-5C39-8B5B-6866-6D14C2CCD83C}"/>
+              </a:ext>
+            </a:extLst>
+          </p:cNvPr>
+          <p:cNvPicPr>
+            <a:picLocks noChangeAspect="1"/>
+          </p:cNvPicPr>
+          <p:nvPr/>
+        </p:nvPicPr>
+        <p:blipFill>
+          <a:blip r:embed="rId12" cstate="email">
+            <a:extLst>
+              <a:ext uri="{28A0092B-C50C-407E-A947-70E740481C1C}">
+                <a14:useLocalDpi xmlns:a14="http://schemas.microsoft.com/office/drawing/2010/main"/>
+              </a:ext>
+            </a:extLst>
+          </a:blip>
+          <a:stretch>
+            <a:fillRect/>
+          </a:stretch>
+        </p:blipFill>
+        <p:spPr>
+          <a:xfrm>
+            <a:off x="4797122" y="5344667"/>
+            <a:ext cx="1322454" cy="750049"/>
+          </a:xfrm>
+          <a:prstGeom prst="rect">
+            <a:avLst/>
+          </a:prstGeom>
+          <a:ln>
+            <a:solidFill>
+              <a:srgbClr val="FF0000"/>
+            </a:solidFill>
+          </a:ln>
+        </p:spPr>
+      </p:pic>
     </p:spTree>
     <p:extLst>
       <p:ext uri="{BB962C8B-B14F-4D97-AF65-F5344CB8AC3E}">

--- a/hinges.pptx
+++ b/hinges.pptx
@@ -5,12 +5,13 @@
     <p:sldMasterId id="2147483648" r:id="rId1"/>
   </p:sldMasterIdLst>
   <p:notesMasterIdLst>
-    <p:notesMasterId r:id="rId5"/>
+    <p:notesMasterId r:id="rId6"/>
   </p:notesMasterIdLst>
   <p:sldIdLst>
     <p:sldId id="261" r:id="rId2"/>
     <p:sldId id="262" r:id="rId3"/>
     <p:sldId id="263" r:id="rId4"/>
+    <p:sldId id="264" r:id="rId5"/>
   </p:sldIdLst>
   <p:sldSz cx="12192000" cy="6858000"/>
   <p:notesSz cx="6858000" cy="9144000"/>
@@ -4536,7 +4537,7 @@
         <p:spPr>
           <a:xfrm>
             <a:off x="57749" y="486507"/>
-            <a:ext cx="3986217" cy="3354765"/>
+            <a:ext cx="4331772" cy="3354765"/>
           </a:xfrm>
           <a:prstGeom prst="rect">
             <a:avLst/>
@@ -4591,6 +4592,16 @@
           </a:p>
           <a:p>
             <a:r>
+              <a:rPr lang="en-US" sz="1400" dirty="0" err="1">
+                <a:solidFill>
+                  <a:srgbClr val="0F0F0F"/>
+                </a:solidFill>
+                <a:latin typeface="Calibri" panose="020F0502020204030204" pitchFamily="34" charset="0"/>
+                <a:cs typeface="Calibri" panose="020F0502020204030204" pitchFamily="34" charset="0"/>
+              </a:rPr>
+              <a:t>tel</a:t>
+            </a:r>
+            <a:r>
               <a:rPr lang="en-US" sz="1400" dirty="0">
                 <a:solidFill>
                   <a:srgbClr val="0F0F0F"/>
@@ -4598,17 +4609,8 @@
                 <a:latin typeface="Calibri" panose="020F0502020204030204" pitchFamily="34" charset="0"/>
                 <a:cs typeface="Calibri" panose="020F0502020204030204" pitchFamily="34" charset="0"/>
               </a:rPr>
-              <a:t>1-800-426-4261</a:t>
-            </a:r>
-          </a:p>
-          <a:p>
-            <a:endParaRPr lang="en-US" sz="1400" dirty="0">
-              <a:solidFill>
-                <a:srgbClr val="0F0F0F"/>
-              </a:solidFill>
-              <a:latin typeface="Calibri" panose="020F0502020204030204" pitchFamily="34" charset="0"/>
-              <a:cs typeface="Calibri" panose="020F0502020204030204" pitchFamily="34" charset="0"/>
-            </a:endParaRPr>
+              <a:t>: 800-426-4261</a:t>
+            </a:r>
           </a:p>
           <a:p>
             <a:r>
@@ -4642,6 +4644,16 @@
           </a:p>
           <a:p>
             <a:r>
+              <a:rPr lang="en-US" sz="1400" dirty="0" err="1">
+                <a:solidFill>
+                  <a:srgbClr val="0F0F0F"/>
+                </a:solidFill>
+                <a:latin typeface="Calibri" panose="020F0502020204030204" pitchFamily="34" charset="0"/>
+                <a:cs typeface="Calibri" panose="020F0502020204030204" pitchFamily="34" charset="0"/>
+              </a:rPr>
+              <a:t>tel</a:t>
+            </a:r>
+            <a:r>
               <a:rPr lang="en-US" sz="1400" dirty="0">
                 <a:solidFill>
                   <a:srgbClr val="0F0F0F"/>
@@ -4649,8 +4661,47 @@
                 <a:latin typeface="Calibri" panose="020F0502020204030204" pitchFamily="34" charset="0"/>
                 <a:cs typeface="Calibri" panose="020F0502020204030204" pitchFamily="34" charset="0"/>
               </a:rPr>
-              <a:t>1-888-888-7020</a:t>
-            </a:r>
+              <a:t>: 888-888-7020</a:t>
+            </a:r>
+          </a:p>
+          <a:p>
+            <a:endParaRPr lang="en-US" sz="1400" dirty="0">
+              <a:solidFill>
+                <a:srgbClr val="0F0F0F"/>
+              </a:solidFill>
+              <a:latin typeface="Calibri" panose="020F0502020204030204" pitchFamily="34" charset="0"/>
+              <a:cs typeface="Calibri" panose="020F0502020204030204" pitchFamily="34" charset="0"/>
+            </a:endParaRPr>
+          </a:p>
+          <a:p>
+            <a:r>
+              <a:rPr lang="en-US" sz="1400" dirty="0">
+                <a:solidFill>
+                  <a:srgbClr val="0F0F0F"/>
+                </a:solidFill>
+                <a:latin typeface="Calibri" panose="020F0502020204030204" pitchFamily="34" charset="0"/>
+                <a:cs typeface="Calibri" panose="020F0502020204030204" pitchFamily="34" charset="0"/>
+              </a:rPr>
+              <a:t>Andersen Hinges - </a:t>
+            </a:r>
+            <a:r>
+              <a:rPr lang="en-US" sz="1000" dirty="0">
+                <a:solidFill>
+                  <a:srgbClr val="0F0F0F"/>
+                </a:solidFill>
+                <a:latin typeface="Calibri" panose="020F0502020204030204" pitchFamily="34" charset="0"/>
+                <a:cs typeface="Calibri" panose="020F0502020204030204" pitchFamily="34" charset="0"/>
+                <a:hlinkClick r:id="rId5"/>
+              </a:rPr>
+              <a:t>https://parts.andersenwindows.com/items_d_fwh_hng.html</a:t>
+            </a:r>
+            <a:endParaRPr lang="en-US" sz="1000" dirty="0">
+              <a:solidFill>
+                <a:srgbClr val="0F0F0F"/>
+              </a:solidFill>
+              <a:latin typeface="Calibri" panose="020F0502020204030204" pitchFamily="34" charset="0"/>
+              <a:cs typeface="Calibri" panose="020F0502020204030204" pitchFamily="34" charset="0"/>
+            </a:endParaRPr>
           </a:p>
           <a:p>
             <a:endParaRPr lang="en-US" sz="1400" dirty="0">
@@ -4672,106 +4723,6 @@
                 <a:cs typeface="Calibri" panose="020F0502020204030204" pitchFamily="34" charset="0"/>
               </a:rPr>
               <a:t>need 5/32" hex wrench (=3.97mm)</a:t>
-            </a:r>
-          </a:p>
-          <a:p>
-            <a:r>
-              <a:rPr lang="en-US" sz="1000" i="0" dirty="0">
-                <a:solidFill>
-                  <a:srgbClr val="0F0F0F"/>
-                </a:solidFill>
-                <a:effectLst/>
-                <a:latin typeface="Calibri" panose="020F0502020204030204" pitchFamily="34" charset="0"/>
-                <a:cs typeface="Calibri" panose="020F0502020204030204" pitchFamily="34" charset="0"/>
-                <a:hlinkClick r:id="rId5"/>
-              </a:rPr>
-              <a:t>https://</a:t>
-            </a:r>
-            <a:r>
-              <a:rPr lang="en-US" sz="1000" i="0" dirty="0" err="1">
-                <a:solidFill>
-                  <a:srgbClr val="0F0F0F"/>
-                </a:solidFill>
-                <a:effectLst/>
-                <a:latin typeface="Calibri" panose="020F0502020204030204" pitchFamily="34" charset="0"/>
-                <a:cs typeface="Calibri" panose="020F0502020204030204" pitchFamily="34" charset="0"/>
-                <a:hlinkClick r:id="rId5"/>
-              </a:rPr>
-              <a:t>parts.andersenwindows.com</a:t>
-            </a:r>
-            <a:r>
-              <a:rPr lang="en-US" sz="1000" i="0" dirty="0">
-                <a:solidFill>
-                  <a:srgbClr val="0F0F0F"/>
-                </a:solidFill>
-                <a:effectLst/>
-                <a:latin typeface="Calibri" panose="020F0502020204030204" pitchFamily="34" charset="0"/>
-                <a:cs typeface="Calibri" panose="020F0502020204030204" pitchFamily="34" charset="0"/>
-                <a:hlinkClick r:id="rId5"/>
-              </a:rPr>
-              <a:t>/detail_2579045__d_fwh_hng.html</a:t>
-            </a:r>
-            <a:r>
-              <a:rPr lang="en-US" sz="1400" dirty="0">
-                <a:solidFill>
-                  <a:srgbClr val="0F0F0F"/>
-                </a:solidFill>
-                <a:latin typeface="Calibri" panose="020F0502020204030204" pitchFamily="34" charset="0"/>
-                <a:cs typeface="Calibri" panose="020F0502020204030204" pitchFamily="34" charset="0"/>
-              </a:rPr>
-              <a:t> </a:t>
-            </a:r>
-            <a:endParaRPr lang="en-US" sz="1400" i="0" dirty="0">
-              <a:solidFill>
-                <a:srgbClr val="0F0F0F"/>
-              </a:solidFill>
-              <a:effectLst/>
-              <a:latin typeface="Calibri" panose="020F0502020204030204" pitchFamily="34" charset="0"/>
-              <a:cs typeface="Calibri" panose="020F0502020204030204" pitchFamily="34" charset="0"/>
-            </a:endParaRPr>
-          </a:p>
-          <a:p>
-            <a:endParaRPr lang="en-US" sz="1400" dirty="0">
-              <a:solidFill>
-                <a:srgbClr val="0F0F0F"/>
-              </a:solidFill>
-              <a:latin typeface="Calibri" panose="020F0502020204030204" pitchFamily="34" charset="0"/>
-              <a:cs typeface="Calibri" panose="020F0502020204030204" pitchFamily="34" charset="0"/>
-            </a:endParaRPr>
-          </a:p>
-          <a:p>
-            <a:r>
-              <a:rPr lang="en-US" sz="1400" i="0" dirty="0">
-                <a:solidFill>
-                  <a:srgbClr val="0F0F0F"/>
-                </a:solidFill>
-                <a:effectLst/>
-                <a:latin typeface="Calibri" panose="020F0502020204030204" pitchFamily="34" charset="0"/>
-                <a:cs typeface="Calibri" panose="020F0502020204030204" pitchFamily="34" charset="0"/>
-              </a:rPr>
-              <a:t>Adjusting A </a:t>
-            </a:r>
-            <a:r>
-              <a:rPr lang="en-US" sz="1400" i="0" dirty="0" err="1">
-                <a:solidFill>
-                  <a:srgbClr val="0F0F0F"/>
-                </a:solidFill>
-                <a:effectLst/>
-                <a:latin typeface="Calibri" panose="020F0502020204030204" pitchFamily="34" charset="0"/>
-                <a:cs typeface="Calibri" panose="020F0502020204030204" pitchFamily="34" charset="0"/>
-              </a:rPr>
-              <a:t>Frenchwood</a:t>
-            </a:r>
-            <a:r>
-              <a:rPr lang="en-US" sz="1400" i="0" dirty="0">
-                <a:solidFill>
-                  <a:srgbClr val="0F0F0F"/>
-                </a:solidFill>
-                <a:effectLst/>
-                <a:latin typeface="Calibri" panose="020F0502020204030204" pitchFamily="34" charset="0"/>
-                <a:cs typeface="Calibri" panose="020F0502020204030204" pitchFamily="34" charset="0"/>
-              </a:rPr>
-              <a:t> Inswing Patio Door (Pre-2005)</a:t>
             </a:r>
           </a:p>
           <a:p>
@@ -4797,7 +4748,7 @@
                 <a:cs typeface="Calibri" panose="020F0502020204030204" pitchFamily="34" charset="0"/>
                 <a:hlinkClick r:id="rId6"/>
               </a:rPr>
-              <a:t>www.youtube.com</a:t>
+              <a:t>parts.andersenwindows.com</a:t>
             </a:r>
             <a:r>
               <a:rPr lang="en-US" sz="1000" i="0" dirty="0">
@@ -4809,7 +4760,83 @@
                 <a:cs typeface="Calibri" panose="020F0502020204030204" pitchFamily="34" charset="0"/>
                 <a:hlinkClick r:id="rId6"/>
               </a:rPr>
-              <a:t>/</a:t>
+              <a:t>/detail_2579045__d_fwh_hng.html</a:t>
+            </a:r>
+            <a:r>
+              <a:rPr lang="en-US" sz="1400" dirty="0">
+                <a:solidFill>
+                  <a:srgbClr val="0F0F0F"/>
+                </a:solidFill>
+                <a:latin typeface="Calibri" panose="020F0502020204030204" pitchFamily="34" charset="0"/>
+                <a:cs typeface="Calibri" panose="020F0502020204030204" pitchFamily="34" charset="0"/>
+              </a:rPr>
+              <a:t> </a:t>
+            </a:r>
+            <a:endParaRPr lang="en-US" sz="1400" i="0" dirty="0">
+              <a:solidFill>
+                <a:srgbClr val="0F0F0F"/>
+              </a:solidFill>
+              <a:effectLst/>
+              <a:latin typeface="Calibri" panose="020F0502020204030204" pitchFamily="34" charset="0"/>
+              <a:cs typeface="Calibri" panose="020F0502020204030204" pitchFamily="34" charset="0"/>
+            </a:endParaRPr>
+          </a:p>
+          <a:p>
+            <a:endParaRPr lang="en-US" sz="1400" dirty="0">
+              <a:solidFill>
+                <a:srgbClr val="0F0F0F"/>
+              </a:solidFill>
+              <a:latin typeface="Calibri" panose="020F0502020204030204" pitchFamily="34" charset="0"/>
+              <a:cs typeface="Calibri" panose="020F0502020204030204" pitchFamily="34" charset="0"/>
+            </a:endParaRPr>
+          </a:p>
+          <a:p>
+            <a:r>
+              <a:rPr lang="en-US" sz="1400" i="0" dirty="0">
+                <a:solidFill>
+                  <a:srgbClr val="0F0F0F"/>
+                </a:solidFill>
+                <a:effectLst/>
+                <a:latin typeface="Calibri" panose="020F0502020204030204" pitchFamily="34" charset="0"/>
+                <a:cs typeface="Calibri" panose="020F0502020204030204" pitchFamily="34" charset="0"/>
+              </a:rPr>
+              <a:t>Adjusting A </a:t>
+            </a:r>
+            <a:r>
+              <a:rPr lang="en-US" sz="1400" i="0" dirty="0" err="1">
+                <a:solidFill>
+                  <a:srgbClr val="0F0F0F"/>
+                </a:solidFill>
+                <a:effectLst/>
+                <a:latin typeface="Calibri" panose="020F0502020204030204" pitchFamily="34" charset="0"/>
+                <a:cs typeface="Calibri" panose="020F0502020204030204" pitchFamily="34" charset="0"/>
+              </a:rPr>
+              <a:t>Frenchwood</a:t>
+            </a:r>
+            <a:r>
+              <a:rPr lang="en-US" sz="1400" i="0" dirty="0">
+                <a:solidFill>
+                  <a:srgbClr val="0F0F0F"/>
+                </a:solidFill>
+                <a:effectLst/>
+                <a:latin typeface="Calibri" panose="020F0502020204030204" pitchFamily="34" charset="0"/>
+                <a:cs typeface="Calibri" panose="020F0502020204030204" pitchFamily="34" charset="0"/>
+              </a:rPr>
+              <a:t> Inswing Patio Door (Pre-2005)</a:t>
+            </a:r>
+          </a:p>
+          <a:p>
+            <a:r>
+              <a:rPr lang="en-US" sz="1000" i="0" dirty="0">
+                <a:solidFill>
+                  <a:srgbClr val="0F0F0F"/>
+                </a:solidFill>
+                <a:effectLst/>
+                <a:latin typeface="Calibri" panose="020F0502020204030204" pitchFamily="34" charset="0"/>
+                <a:cs typeface="Calibri" panose="020F0502020204030204" pitchFamily="34" charset="0"/>
+                <a:hlinkClick r:id="rId7"/>
+              </a:rPr>
+              <a:t>https://</a:t>
             </a:r>
             <a:r>
               <a:rPr lang="en-US" sz="1000" i="0" dirty="0" err="1">
@@ -4819,9 +4846,9 @@
                 <a:effectLst/>
                 <a:latin typeface="Calibri" panose="020F0502020204030204" pitchFamily="34" charset="0"/>
                 <a:cs typeface="Calibri" panose="020F0502020204030204" pitchFamily="34" charset="0"/>
-                <a:hlinkClick r:id="rId6"/>
+                <a:hlinkClick r:id="rId7"/>
               </a:rPr>
-              <a:t>watch?v</a:t>
+              <a:t>www.youtube.com</a:t>
             </a:r>
             <a:r>
               <a:rPr lang="en-US" sz="1000" i="0" dirty="0">
@@ -4831,7 +4858,31 @@
                 <a:effectLst/>
                 <a:latin typeface="Calibri" panose="020F0502020204030204" pitchFamily="34" charset="0"/>
                 <a:cs typeface="Calibri" panose="020F0502020204030204" pitchFamily="34" charset="0"/>
-                <a:hlinkClick r:id="rId6"/>
+                <a:hlinkClick r:id="rId7"/>
+              </a:rPr>
+              <a:t>/</a:t>
+            </a:r>
+            <a:r>
+              <a:rPr lang="en-US" sz="1000" i="0" dirty="0" err="1">
+                <a:solidFill>
+                  <a:srgbClr val="0F0F0F"/>
+                </a:solidFill>
+                <a:effectLst/>
+                <a:latin typeface="Calibri" panose="020F0502020204030204" pitchFamily="34" charset="0"/>
+                <a:cs typeface="Calibri" panose="020F0502020204030204" pitchFamily="34" charset="0"/>
+                <a:hlinkClick r:id="rId7"/>
+              </a:rPr>
+              <a:t>watch?v</a:t>
+            </a:r>
+            <a:r>
+              <a:rPr lang="en-US" sz="1000" i="0" dirty="0">
+                <a:solidFill>
+                  <a:srgbClr val="0F0F0F"/>
+                </a:solidFill>
+                <a:effectLst/>
+                <a:latin typeface="Calibri" panose="020F0502020204030204" pitchFamily="34" charset="0"/>
+                <a:cs typeface="Calibri" panose="020F0502020204030204" pitchFamily="34" charset="0"/>
+                <a:hlinkClick r:id="rId7"/>
               </a:rPr>
               <a:t>=3jjh4aQmQ3Q</a:t>
             </a:r>
@@ -4876,7 +4927,7 @@
                 <a:effectLst/>
                 <a:latin typeface="Calibri" panose="020F0502020204030204" pitchFamily="34" charset="0"/>
                 <a:cs typeface="Calibri" panose="020F0502020204030204" pitchFamily="34" charset="0"/>
-                <a:hlinkClick r:id="rId7"/>
+                <a:hlinkClick r:id="rId8"/>
               </a:rPr>
               <a:t>https://www.youtube.com/watch?v=sBZzJ-IhidI</a:t>
             </a:r>
@@ -4905,7 +4956,7 @@
           <p:nvPr/>
         </p:nvPicPr>
         <p:blipFill>
-          <a:blip r:embed="rId8" cstate="email">
+          <a:blip r:embed="rId9" cstate="email">
             <a:extLst>
               <a:ext uri="{28A0092B-C50C-407E-A947-70E740481C1C}">
                 <a14:useLocalDpi xmlns:a14="http://schemas.microsoft.com/office/drawing/2010/main"/>
@@ -4957,7 +5008,7 @@
           <p:nvPr/>
         </p:nvPicPr>
         <p:blipFill rotWithShape="1">
-          <a:blip r:embed="rId9" cstate="email">
+          <a:blip r:embed="rId10" cstate="email">
             <a:extLst>
               <a:ext uri="{28A0092B-C50C-407E-A947-70E740481C1C}">
                 <a14:useLocalDpi xmlns:a14="http://schemas.microsoft.com/office/drawing/2010/main"/>
@@ -5006,7 +5057,7 @@
         </p:nvSpPr>
         <p:spPr>
           <a:xfrm>
-            <a:off x="4331371" y="719966"/>
+            <a:off x="4439857" y="719966"/>
             <a:ext cx="2770470" cy="1815882"/>
           </a:xfrm>
           <a:prstGeom prst="rect">
@@ -5096,7 +5147,7 @@
           <p:nvPr/>
         </p:nvPicPr>
         <p:blipFill>
-          <a:blip r:embed="rId10" cstate="email">
+          <a:blip r:embed="rId11" cstate="email">
             <a:extLst>
               <a:ext uri="{28A0092B-C50C-407E-A947-70E740481C1C}">
                 <a14:useLocalDpi xmlns:a14="http://schemas.microsoft.com/office/drawing/2010/main"/>
@@ -5284,7 +5335,7 @@
           <p:nvPr/>
         </p:nvPicPr>
         <p:blipFill rotWithShape="1">
-          <a:blip r:embed="rId11" cstate="email">
+          <a:blip r:embed="rId12" cstate="email">
             <a:extLst>
               <a:ext uri="{28A0092B-C50C-407E-A947-70E740481C1C}">
                 <a14:useLocalDpi xmlns:a14="http://schemas.microsoft.com/office/drawing/2010/main"/>
@@ -5334,7 +5385,7 @@
           <p:nvPr/>
         </p:nvPicPr>
         <p:blipFill>
-          <a:blip r:embed="rId12" cstate="email">
+          <a:blip r:embed="rId13" cstate="email">
             <a:extLst>
               <a:ext uri="{28A0092B-C50C-407E-A947-70E740481C1C}">
                 <a14:useLocalDpi xmlns:a14="http://schemas.microsoft.com/office/drawing/2010/main"/>
@@ -5364,6 +5415,1107 @@
     <p:extLst>
       <p:ext uri="{BB962C8B-B14F-4D97-AF65-F5344CB8AC3E}">
         <p14:creationId xmlns:p14="http://schemas.microsoft.com/office/powerpoint/2010/main" val="1053730920"/>
+      </p:ext>
+    </p:extLst>
+  </p:cSld>
+  <p:clrMapOvr>
+    <a:masterClrMapping/>
+  </p:clrMapOvr>
+</p:sld>
+</file>
+
+<file path=ppt/slides/slide4.xml><?xml version="1.0" encoding="utf-8"?>
+<p:sld xmlns:a="http://schemas.openxmlformats.org/drawingml/2006/main" xmlns:r="http://schemas.openxmlformats.org/officeDocument/2006/relationships" xmlns:p="http://schemas.openxmlformats.org/presentationml/2006/main">
+  <p:cSld>
+    <p:spTree>
+      <p:nvGrpSpPr>
+        <p:cNvPr id="1" name=""/>
+        <p:cNvGrpSpPr/>
+        <p:nvPr/>
+      </p:nvGrpSpPr>
+      <p:grpSpPr>
+        <a:xfrm>
+          <a:off x="0" y="0"/>
+          <a:ext cx="0" cy="0"/>
+          <a:chOff x="0" y="0"/>
+          <a:chExt cx="0" cy="0"/>
+        </a:xfrm>
+      </p:grpSpPr>
+      <p:pic>
+        <p:nvPicPr>
+          <p:cNvPr id="2" name="Picture 1">
+            <a:extLst>
+              <a:ext uri="{FF2B5EF4-FFF2-40B4-BE49-F238E27FC236}">
+                <a16:creationId xmlns:a16="http://schemas.microsoft.com/office/drawing/2014/main" id="{3533AD92-30D4-92E5-D6D2-8F5D6215EFD1}"/>
+              </a:ext>
+            </a:extLst>
+          </p:cNvPr>
+          <p:cNvPicPr>
+            <a:picLocks noChangeAspect="1"/>
+          </p:cNvPicPr>
+          <p:nvPr/>
+        </p:nvPicPr>
+        <p:blipFill>
+          <a:blip r:embed="rId2" cstate="email">
+            <a:extLst>
+              <a:ext uri="{28A0092B-C50C-407E-A947-70E740481C1C}">
+                <a14:useLocalDpi xmlns:a14="http://schemas.microsoft.com/office/drawing/2010/main"/>
+              </a:ext>
+            </a:extLst>
+          </a:blip>
+          <a:stretch>
+            <a:fillRect/>
+          </a:stretch>
+        </p:blipFill>
+        <p:spPr>
+          <a:xfrm>
+            <a:off x="411997" y="362794"/>
+            <a:ext cx="7772400" cy="3776667"/>
+          </a:xfrm>
+          <a:prstGeom prst="rect">
+            <a:avLst/>
+          </a:prstGeom>
+        </p:spPr>
+      </p:pic>
+      <p:graphicFrame>
+        <p:nvGraphicFramePr>
+          <p:cNvPr id="3" name="Table 2">
+            <a:extLst>
+              <a:ext uri="{FF2B5EF4-FFF2-40B4-BE49-F238E27FC236}">
+                <a16:creationId xmlns:a16="http://schemas.microsoft.com/office/drawing/2014/main" id="{52D5817A-0316-C176-D239-D180F804A839}"/>
+              </a:ext>
+            </a:extLst>
+          </p:cNvPr>
+          <p:cNvGraphicFramePr>
+            <a:graphicFrameLocks noGrp="1"/>
+          </p:cNvGraphicFramePr>
+          <p:nvPr>
+            <p:extLst>
+              <p:ext uri="{D42A27DB-BD31-4B8C-83A1-F6EECF244321}">
+                <p14:modId xmlns:p14="http://schemas.microsoft.com/office/powerpoint/2010/main" val="1020736888"/>
+              </p:ext>
+            </p:extLst>
+          </p:nvPr>
+        </p:nvGraphicFramePr>
+        <p:xfrm>
+          <a:off x="411997" y="4646387"/>
+          <a:ext cx="5280805" cy="1104900"/>
+        </p:xfrm>
+        <a:graphic>
+          <a:graphicData uri="http://schemas.openxmlformats.org/drawingml/2006/table">
+            <a:tbl>
+              <a:tblPr/>
+              <a:tblGrid>
+                <a:gridCol w="1576711">
+                  <a:extLst>
+                    <a:ext uri="{9D8B030D-6E8A-4147-A177-3AD203B41FA5}">
+                      <a16:colId xmlns:a16="http://schemas.microsoft.com/office/drawing/2014/main" val="3327541240"/>
+                    </a:ext>
+                  </a:extLst>
+                </a:gridCol>
+                <a:gridCol w="2406599">
+                  <a:extLst>
+                    <a:ext uri="{9D8B030D-6E8A-4147-A177-3AD203B41FA5}">
+                      <a16:colId xmlns:a16="http://schemas.microsoft.com/office/drawing/2014/main" val="605654601"/>
+                    </a:ext>
+                  </a:extLst>
+                </a:gridCol>
+                <a:gridCol w="1297495">
+                  <a:extLst>
+                    <a:ext uri="{9D8B030D-6E8A-4147-A177-3AD203B41FA5}">
+                      <a16:colId xmlns:a16="http://schemas.microsoft.com/office/drawing/2014/main" val="2903411824"/>
+                    </a:ext>
+                  </a:extLst>
+                </a:gridCol>
+              </a:tblGrid>
+              <a:tr h="200025">
+                <a:tc>
+                  <a:txBody>
+                    <a:bodyPr/>
+                    <a:lstStyle/>
+                    <a:p>
+                      <a:pPr rtl="0" fontAlgn="b"/>
+                      <a:r>
+                        <a:rPr lang="en-US" sz="1200" b="1">
+                          <a:solidFill>
+                            <a:srgbClr val="7A7A7A"/>
+                          </a:solidFill>
+                          <a:effectLst/>
+                          <a:highlight>
+                            <a:srgbClr val="FFFFFF"/>
+                          </a:highlight>
+                          <a:latin typeface="Roboto" panose="02000000000000000000" pitchFamily="2" charset="0"/>
+                        </a:rPr>
+                        <a:t>Door Thickness</a:t>
+                      </a:r>
+                    </a:p>
+                  </a:txBody>
+                  <a:tcPr marL="28575" marR="28575" marT="19050" marB="19050" anchor="b">
+                    <a:lnL w="9525" cap="flat" cmpd="sng" algn="ctr">
+                      <a:solidFill>
+                        <a:srgbClr val="CCCCCC"/>
+                      </a:solidFill>
+                      <a:prstDash val="solid"/>
+                      <a:round/>
+                      <a:headEnd type="none" w="med" len="med"/>
+                      <a:tailEnd type="none" w="med" len="med"/>
+                    </a:lnL>
+                    <a:lnR w="9525" cap="flat" cmpd="sng" algn="ctr">
+                      <a:solidFill>
+                        <a:srgbClr val="CCCCCC"/>
+                      </a:solidFill>
+                      <a:prstDash val="solid"/>
+                      <a:round/>
+                      <a:headEnd type="none" w="med" len="med"/>
+                      <a:tailEnd type="none" w="med" len="med"/>
+                    </a:lnR>
+                    <a:lnT w="9525" cap="flat" cmpd="sng" algn="ctr">
+                      <a:solidFill>
+                        <a:srgbClr val="CCCCCC"/>
+                      </a:solidFill>
+                      <a:prstDash val="solid"/>
+                      <a:round/>
+                      <a:headEnd type="none" w="med" len="med"/>
+                      <a:tailEnd type="none" w="med" len="med"/>
+                    </a:lnT>
+                    <a:lnB w="9525" cap="flat" cmpd="sng" algn="ctr">
+                      <a:solidFill>
+                        <a:srgbClr val="CCCCCC"/>
+                      </a:solidFill>
+                      <a:prstDash val="solid"/>
+                      <a:round/>
+                      <a:headEnd type="none" w="med" len="med"/>
+                      <a:tailEnd type="none" w="med" len="med"/>
+                    </a:lnB>
+                    <a:solidFill>
+                      <a:srgbClr val="FFFFFF"/>
+                    </a:solidFill>
+                  </a:tcPr>
+                </a:tc>
+                <a:tc>
+                  <a:txBody>
+                    <a:bodyPr/>
+                    <a:lstStyle/>
+                    <a:p>
+                      <a:pPr rtl="0" fontAlgn="b"/>
+                      <a:r>
+                        <a:rPr lang="en-US" sz="1200" b="1">
+                          <a:solidFill>
+                            <a:srgbClr val="7A7A7A"/>
+                          </a:solidFill>
+                          <a:effectLst/>
+                          <a:highlight>
+                            <a:srgbClr val="FFFFFF"/>
+                          </a:highlight>
+                          <a:latin typeface="Roboto" panose="02000000000000000000" pitchFamily="2" charset="0"/>
+                        </a:rPr>
+                        <a:t>Door Width</a:t>
+                      </a:r>
+                    </a:p>
+                  </a:txBody>
+                  <a:tcPr marL="28575" marR="28575" marT="19050" marB="19050" anchor="b">
+                    <a:lnL w="9525" cap="flat" cmpd="sng" algn="ctr">
+                      <a:solidFill>
+                        <a:srgbClr val="CCCCCC"/>
+                      </a:solidFill>
+                      <a:prstDash val="solid"/>
+                      <a:round/>
+                      <a:headEnd type="none" w="med" len="med"/>
+                      <a:tailEnd type="none" w="med" len="med"/>
+                    </a:lnL>
+                    <a:lnR w="9525" cap="flat" cmpd="sng" algn="ctr">
+                      <a:solidFill>
+                        <a:srgbClr val="60936B"/>
+                      </a:solidFill>
+                      <a:prstDash val="solid"/>
+                      <a:round/>
+                      <a:headEnd type="none" w="med" len="med"/>
+                      <a:tailEnd type="none" w="med" len="med"/>
+                    </a:lnR>
+                    <a:lnT w="9525" cap="flat" cmpd="sng" algn="ctr">
+                      <a:solidFill>
+                        <a:srgbClr val="CCCCCC"/>
+                      </a:solidFill>
+                      <a:prstDash val="solid"/>
+                      <a:round/>
+                      <a:headEnd type="none" w="med" len="med"/>
+                      <a:tailEnd type="none" w="med" len="med"/>
+                    </a:lnT>
+                    <a:lnB w="9525" cap="flat" cmpd="sng" algn="ctr">
+                      <a:solidFill>
+                        <a:srgbClr val="CCCCCC"/>
+                      </a:solidFill>
+                      <a:prstDash val="solid"/>
+                      <a:round/>
+                      <a:headEnd type="none" w="med" len="med"/>
+                      <a:tailEnd type="none" w="med" len="med"/>
+                    </a:lnB>
+                    <a:solidFill>
+                      <a:srgbClr val="FFFFFF"/>
+                    </a:solidFill>
+                  </a:tcPr>
+                </a:tc>
+                <a:tc>
+                  <a:txBody>
+                    <a:bodyPr/>
+                    <a:lstStyle/>
+                    <a:p>
+                      <a:pPr rtl="0" fontAlgn="b"/>
+                      <a:r>
+                        <a:rPr lang="en-US" sz="1200" b="1">
+                          <a:solidFill>
+                            <a:srgbClr val="7A7A7A"/>
+                          </a:solidFill>
+                          <a:effectLst/>
+                          <a:highlight>
+                            <a:srgbClr val="FFFFFF"/>
+                          </a:highlight>
+                          <a:latin typeface="Roboto" panose="02000000000000000000" pitchFamily="2" charset="0"/>
+                        </a:rPr>
+                        <a:t>Hinge Size to Use</a:t>
+                      </a:r>
+                    </a:p>
+                  </a:txBody>
+                  <a:tcPr marL="0" marR="0" marT="19050" marB="19050" anchor="b">
+                    <a:lnL w="9525" cap="flat" cmpd="sng" algn="ctr">
+                      <a:solidFill>
+                        <a:srgbClr val="60936B"/>
+                      </a:solidFill>
+                      <a:prstDash val="solid"/>
+                      <a:round/>
+                      <a:headEnd type="none" w="med" len="med"/>
+                      <a:tailEnd type="none" w="med" len="med"/>
+                    </a:lnL>
+                    <a:lnR w="9525" cap="flat" cmpd="sng" algn="ctr">
+                      <a:solidFill>
+                        <a:srgbClr val="60936B"/>
+                      </a:solidFill>
+                      <a:prstDash val="solid"/>
+                      <a:round/>
+                      <a:headEnd type="none" w="med" len="med"/>
+                      <a:tailEnd type="none" w="med" len="med"/>
+                    </a:lnR>
+                    <a:lnT w="9525" cap="flat" cmpd="sng" algn="ctr">
+                      <a:solidFill>
+                        <a:srgbClr val="60936B"/>
+                      </a:solidFill>
+                      <a:prstDash val="solid"/>
+                      <a:round/>
+                      <a:headEnd type="none" w="med" len="med"/>
+                      <a:tailEnd type="none" w="med" len="med"/>
+                    </a:lnT>
+                    <a:lnB w="9525" cap="flat" cmpd="sng" algn="ctr">
+                      <a:solidFill>
+                        <a:srgbClr val="CCCCCC"/>
+                      </a:solidFill>
+                      <a:prstDash val="solid"/>
+                      <a:round/>
+                      <a:headEnd type="none" w="med" len="med"/>
+                      <a:tailEnd type="none" w="med" len="med"/>
+                    </a:lnB>
+                    <a:solidFill>
+                      <a:srgbClr val="FFFFFF"/>
+                    </a:solidFill>
+                  </a:tcPr>
+                </a:tc>
+                <a:extLst>
+                  <a:ext uri="{0D108BD9-81ED-4DB2-BD59-A6C34878D82A}">
+                    <a16:rowId xmlns:a16="http://schemas.microsoft.com/office/drawing/2014/main" val="2934276438"/>
+                  </a:ext>
+                </a:extLst>
+              </a:tr>
+              <a:tr h="200025">
+                <a:tc>
+                  <a:txBody>
+                    <a:bodyPr/>
+                    <a:lstStyle/>
+                    <a:p>
+                      <a:pPr rtl="0" fontAlgn="b"/>
+                      <a:r>
+                        <a:rPr lang="en-US" sz="1200" b="0">
+                          <a:solidFill>
+                            <a:srgbClr val="7A7A7A"/>
+                          </a:solidFill>
+                          <a:effectLst/>
+                          <a:highlight>
+                            <a:srgbClr val="FFFFFF"/>
+                          </a:highlight>
+                          <a:latin typeface="Roboto" panose="02000000000000000000" pitchFamily="2" charset="0"/>
+                        </a:rPr>
+                        <a:t>1-3/8 inches thick</a:t>
+                      </a:r>
+                    </a:p>
+                  </a:txBody>
+                  <a:tcPr marL="28575" marR="28575" marT="19050" marB="19050" anchor="b">
+                    <a:lnL w="9525" cap="flat" cmpd="sng" algn="ctr">
+                      <a:solidFill>
+                        <a:srgbClr val="CCCCCC"/>
+                      </a:solidFill>
+                      <a:prstDash val="solid"/>
+                      <a:round/>
+                      <a:headEnd type="none" w="med" len="med"/>
+                      <a:tailEnd type="none" w="med" len="med"/>
+                    </a:lnL>
+                    <a:lnR w="9525" cap="flat" cmpd="sng" algn="ctr">
+                      <a:solidFill>
+                        <a:srgbClr val="CCCCCC"/>
+                      </a:solidFill>
+                      <a:prstDash val="solid"/>
+                      <a:round/>
+                      <a:headEnd type="none" w="med" len="med"/>
+                      <a:tailEnd type="none" w="med" len="med"/>
+                    </a:lnR>
+                    <a:lnT w="9525" cap="flat" cmpd="sng" algn="ctr">
+                      <a:solidFill>
+                        <a:srgbClr val="CCCCCC"/>
+                      </a:solidFill>
+                      <a:prstDash val="solid"/>
+                      <a:round/>
+                      <a:headEnd type="none" w="med" len="med"/>
+                      <a:tailEnd type="none" w="med" len="med"/>
+                    </a:lnT>
+                    <a:lnB w="9525" cap="flat" cmpd="sng" algn="ctr">
+                      <a:solidFill>
+                        <a:srgbClr val="CCCCCC"/>
+                      </a:solidFill>
+                      <a:prstDash val="solid"/>
+                      <a:round/>
+                      <a:headEnd type="none" w="med" len="med"/>
+                      <a:tailEnd type="none" w="med" len="med"/>
+                    </a:lnB>
+                    <a:solidFill>
+                      <a:srgbClr val="FFFFFF"/>
+                    </a:solidFill>
+                  </a:tcPr>
+                </a:tc>
+                <a:tc>
+                  <a:txBody>
+                    <a:bodyPr/>
+                    <a:lstStyle/>
+                    <a:p>
+                      <a:pPr rtl="0" fontAlgn="b"/>
+                      <a:r>
+                        <a:rPr lang="en-US" sz="1200" b="0">
+                          <a:solidFill>
+                            <a:srgbClr val="7A7A7A"/>
+                          </a:solidFill>
+                          <a:effectLst/>
+                          <a:highlight>
+                            <a:srgbClr val="FFFFFF"/>
+                          </a:highlight>
+                          <a:latin typeface="Roboto" panose="02000000000000000000" pitchFamily="2" charset="0"/>
+                        </a:rPr>
+                        <a:t>up to 32 inches</a:t>
+                      </a:r>
+                    </a:p>
+                  </a:txBody>
+                  <a:tcPr marL="28575" marR="28575" marT="19050" marB="19050" anchor="b">
+                    <a:lnL w="9525" cap="flat" cmpd="sng" algn="ctr">
+                      <a:solidFill>
+                        <a:srgbClr val="CCCCCC"/>
+                      </a:solidFill>
+                      <a:prstDash val="solid"/>
+                      <a:round/>
+                      <a:headEnd type="none" w="med" len="med"/>
+                      <a:tailEnd type="none" w="med" len="med"/>
+                    </a:lnL>
+                    <a:lnR w="9525" cap="flat" cmpd="sng" algn="ctr">
+                      <a:solidFill>
+                        <a:srgbClr val="CCCCCC"/>
+                      </a:solidFill>
+                      <a:prstDash val="solid"/>
+                      <a:round/>
+                      <a:headEnd type="none" w="med" len="med"/>
+                      <a:tailEnd type="none" w="med" len="med"/>
+                    </a:lnR>
+                    <a:lnT w="9525" cap="flat" cmpd="sng" algn="ctr">
+                      <a:solidFill>
+                        <a:srgbClr val="CCCCCC"/>
+                      </a:solidFill>
+                      <a:prstDash val="solid"/>
+                      <a:round/>
+                      <a:headEnd type="none" w="med" len="med"/>
+                      <a:tailEnd type="none" w="med" len="med"/>
+                    </a:lnT>
+                    <a:lnB w="9525" cap="flat" cmpd="sng" algn="ctr">
+                      <a:solidFill>
+                        <a:srgbClr val="CCCCCC"/>
+                      </a:solidFill>
+                      <a:prstDash val="solid"/>
+                      <a:round/>
+                      <a:headEnd type="none" w="med" len="med"/>
+                      <a:tailEnd type="none" w="med" len="med"/>
+                    </a:lnB>
+                    <a:solidFill>
+                      <a:srgbClr val="FFFFFF"/>
+                    </a:solidFill>
+                  </a:tcPr>
+                </a:tc>
+                <a:tc>
+                  <a:txBody>
+                    <a:bodyPr/>
+                    <a:lstStyle/>
+                    <a:p>
+                      <a:pPr rtl="0" fontAlgn="b"/>
+                      <a:r>
+                        <a:rPr lang="en-US" sz="1200" b="0" dirty="0">
+                          <a:solidFill>
+                            <a:srgbClr val="7A7A7A"/>
+                          </a:solidFill>
+                          <a:effectLst/>
+                          <a:highlight>
+                            <a:srgbClr val="FFFFFF"/>
+                          </a:highlight>
+                          <a:latin typeface="Roboto" panose="02000000000000000000" pitchFamily="2" charset="0"/>
+                        </a:rPr>
+                        <a:t>3 x 3 hinge</a:t>
+                      </a:r>
+                    </a:p>
+                  </a:txBody>
+                  <a:tcPr marL="28575" marR="28575" marT="19050" marB="19050" anchor="b">
+                    <a:lnL w="9525" cap="flat" cmpd="sng" algn="ctr">
+                      <a:solidFill>
+                        <a:srgbClr val="CCCCCC"/>
+                      </a:solidFill>
+                      <a:prstDash val="solid"/>
+                      <a:round/>
+                      <a:headEnd type="none" w="med" len="med"/>
+                      <a:tailEnd type="none" w="med" len="med"/>
+                    </a:lnL>
+                    <a:lnR w="9525" cap="flat" cmpd="sng" algn="ctr">
+                      <a:solidFill>
+                        <a:srgbClr val="CCCCCC"/>
+                      </a:solidFill>
+                      <a:prstDash val="solid"/>
+                      <a:round/>
+                      <a:headEnd type="none" w="med" len="med"/>
+                      <a:tailEnd type="none" w="med" len="med"/>
+                    </a:lnR>
+                    <a:lnT w="9525" cap="flat" cmpd="sng" algn="ctr">
+                      <a:solidFill>
+                        <a:srgbClr val="CCCCCC"/>
+                      </a:solidFill>
+                      <a:prstDash val="solid"/>
+                      <a:round/>
+                      <a:headEnd type="none" w="med" len="med"/>
+                      <a:tailEnd type="none" w="med" len="med"/>
+                    </a:lnT>
+                    <a:lnB w="9525" cap="flat" cmpd="sng" algn="ctr">
+                      <a:solidFill>
+                        <a:srgbClr val="CCCCCC"/>
+                      </a:solidFill>
+                      <a:prstDash val="solid"/>
+                      <a:round/>
+                      <a:headEnd type="none" w="med" len="med"/>
+                      <a:tailEnd type="none" w="med" len="med"/>
+                    </a:lnB>
+                    <a:solidFill>
+                      <a:srgbClr val="FFFFFF"/>
+                    </a:solidFill>
+                  </a:tcPr>
+                </a:tc>
+                <a:extLst>
+                  <a:ext uri="{0D108BD9-81ED-4DB2-BD59-A6C34878D82A}">
+                    <a16:rowId xmlns:a16="http://schemas.microsoft.com/office/drawing/2014/main" val="1057037394"/>
+                  </a:ext>
+                </a:extLst>
+              </a:tr>
+              <a:tr h="200025">
+                <a:tc>
+                  <a:txBody>
+                    <a:bodyPr/>
+                    <a:lstStyle/>
+                    <a:p>
+                      <a:pPr rtl="0" fontAlgn="b"/>
+                      <a:r>
+                        <a:rPr lang="en-US" sz="1200" b="0">
+                          <a:solidFill>
+                            <a:srgbClr val="7A7A7A"/>
+                          </a:solidFill>
+                          <a:effectLst/>
+                          <a:highlight>
+                            <a:srgbClr val="FFFFFF"/>
+                          </a:highlight>
+                          <a:latin typeface="Roboto" panose="02000000000000000000" pitchFamily="2" charset="0"/>
+                        </a:rPr>
+                        <a:t>1-3/8 inches thick</a:t>
+                      </a:r>
+                    </a:p>
+                  </a:txBody>
+                  <a:tcPr marL="28575" marR="28575" marT="19050" marB="19050" anchor="b">
+                    <a:lnL w="9525" cap="flat" cmpd="sng" algn="ctr">
+                      <a:solidFill>
+                        <a:srgbClr val="CCCCCC"/>
+                      </a:solidFill>
+                      <a:prstDash val="solid"/>
+                      <a:round/>
+                      <a:headEnd type="none" w="med" len="med"/>
+                      <a:tailEnd type="none" w="med" len="med"/>
+                    </a:lnL>
+                    <a:lnR w="9525" cap="flat" cmpd="sng" algn="ctr">
+                      <a:solidFill>
+                        <a:srgbClr val="CCCCCC"/>
+                      </a:solidFill>
+                      <a:prstDash val="solid"/>
+                      <a:round/>
+                      <a:headEnd type="none" w="med" len="med"/>
+                      <a:tailEnd type="none" w="med" len="med"/>
+                    </a:lnR>
+                    <a:lnT w="9525" cap="flat" cmpd="sng" algn="ctr">
+                      <a:solidFill>
+                        <a:srgbClr val="CCCCCC"/>
+                      </a:solidFill>
+                      <a:prstDash val="solid"/>
+                      <a:round/>
+                      <a:headEnd type="none" w="med" len="med"/>
+                      <a:tailEnd type="none" w="med" len="med"/>
+                    </a:lnT>
+                    <a:lnB w="9525" cap="flat" cmpd="sng" algn="ctr">
+                      <a:solidFill>
+                        <a:srgbClr val="CCCCCC"/>
+                      </a:solidFill>
+                      <a:prstDash val="solid"/>
+                      <a:round/>
+                      <a:headEnd type="none" w="med" len="med"/>
+                      <a:tailEnd type="none" w="med" len="med"/>
+                    </a:lnB>
+                    <a:solidFill>
+                      <a:srgbClr val="FFFFFF"/>
+                    </a:solidFill>
+                  </a:tcPr>
+                </a:tc>
+                <a:tc>
+                  <a:txBody>
+                    <a:bodyPr/>
+                    <a:lstStyle/>
+                    <a:p>
+                      <a:pPr rtl="0" fontAlgn="b"/>
+                      <a:r>
+                        <a:rPr lang="en-US" sz="1200" b="0">
+                          <a:solidFill>
+                            <a:srgbClr val="7A7A7A"/>
+                          </a:solidFill>
+                          <a:effectLst/>
+                          <a:highlight>
+                            <a:srgbClr val="FFFFFF"/>
+                          </a:highlight>
+                          <a:latin typeface="Roboto" panose="02000000000000000000" pitchFamily="2" charset="0"/>
+                        </a:rPr>
+                        <a:t>between 32 and 37 inches</a:t>
+                      </a:r>
+                    </a:p>
+                  </a:txBody>
+                  <a:tcPr marL="28575" marR="28575" marT="19050" marB="19050" anchor="b">
+                    <a:lnL w="9525" cap="flat" cmpd="sng" algn="ctr">
+                      <a:solidFill>
+                        <a:srgbClr val="CCCCCC"/>
+                      </a:solidFill>
+                      <a:prstDash val="solid"/>
+                      <a:round/>
+                      <a:headEnd type="none" w="med" len="med"/>
+                      <a:tailEnd type="none" w="med" len="med"/>
+                    </a:lnL>
+                    <a:lnR w="9525" cap="flat" cmpd="sng" algn="ctr">
+                      <a:solidFill>
+                        <a:srgbClr val="CCCCCC"/>
+                      </a:solidFill>
+                      <a:prstDash val="solid"/>
+                      <a:round/>
+                      <a:headEnd type="none" w="med" len="med"/>
+                      <a:tailEnd type="none" w="med" len="med"/>
+                    </a:lnR>
+                    <a:lnT w="9525" cap="flat" cmpd="sng" algn="ctr">
+                      <a:solidFill>
+                        <a:srgbClr val="CCCCCC"/>
+                      </a:solidFill>
+                      <a:prstDash val="solid"/>
+                      <a:round/>
+                      <a:headEnd type="none" w="med" len="med"/>
+                      <a:tailEnd type="none" w="med" len="med"/>
+                    </a:lnT>
+                    <a:lnB w="9525" cap="flat" cmpd="sng" algn="ctr">
+                      <a:solidFill>
+                        <a:srgbClr val="CCCCCC"/>
+                      </a:solidFill>
+                      <a:prstDash val="solid"/>
+                      <a:round/>
+                      <a:headEnd type="none" w="med" len="med"/>
+                      <a:tailEnd type="none" w="med" len="med"/>
+                    </a:lnB>
+                    <a:solidFill>
+                      <a:srgbClr val="FFFFFF"/>
+                    </a:solidFill>
+                  </a:tcPr>
+                </a:tc>
+                <a:tc>
+                  <a:txBody>
+                    <a:bodyPr/>
+                    <a:lstStyle/>
+                    <a:p>
+                      <a:pPr rtl="0" fontAlgn="b"/>
+                      <a:r>
+                        <a:rPr lang="en-US" sz="1200" b="0">
+                          <a:solidFill>
+                            <a:srgbClr val="7A7A7A"/>
+                          </a:solidFill>
+                          <a:effectLst/>
+                          <a:highlight>
+                            <a:srgbClr val="FFFFFF"/>
+                          </a:highlight>
+                          <a:latin typeface="Roboto" panose="02000000000000000000" pitchFamily="2" charset="0"/>
+                        </a:rPr>
+                        <a:t>4 x 4 hinge</a:t>
+                      </a:r>
+                    </a:p>
+                  </a:txBody>
+                  <a:tcPr marL="28575" marR="28575" marT="19050" marB="19050" anchor="b">
+                    <a:lnL w="9525" cap="flat" cmpd="sng" algn="ctr">
+                      <a:solidFill>
+                        <a:srgbClr val="CCCCCC"/>
+                      </a:solidFill>
+                      <a:prstDash val="solid"/>
+                      <a:round/>
+                      <a:headEnd type="none" w="med" len="med"/>
+                      <a:tailEnd type="none" w="med" len="med"/>
+                    </a:lnL>
+                    <a:lnR w="9525" cap="flat" cmpd="sng" algn="ctr">
+                      <a:solidFill>
+                        <a:srgbClr val="CCCCCC"/>
+                      </a:solidFill>
+                      <a:prstDash val="solid"/>
+                      <a:round/>
+                      <a:headEnd type="none" w="med" len="med"/>
+                      <a:tailEnd type="none" w="med" len="med"/>
+                    </a:lnR>
+                    <a:lnT w="9525" cap="flat" cmpd="sng" algn="ctr">
+                      <a:solidFill>
+                        <a:srgbClr val="CCCCCC"/>
+                      </a:solidFill>
+                      <a:prstDash val="solid"/>
+                      <a:round/>
+                      <a:headEnd type="none" w="med" len="med"/>
+                      <a:tailEnd type="none" w="med" len="med"/>
+                    </a:lnT>
+                    <a:lnB w="9525" cap="flat" cmpd="sng" algn="ctr">
+                      <a:solidFill>
+                        <a:srgbClr val="40566A"/>
+                      </a:solidFill>
+                      <a:prstDash val="solid"/>
+                      <a:round/>
+                      <a:headEnd type="none" w="med" len="med"/>
+                      <a:tailEnd type="none" w="med" len="med"/>
+                    </a:lnB>
+                    <a:solidFill>
+                      <a:srgbClr val="FFFFFF"/>
+                    </a:solidFill>
+                  </a:tcPr>
+                </a:tc>
+                <a:extLst>
+                  <a:ext uri="{0D108BD9-81ED-4DB2-BD59-A6C34878D82A}">
+                    <a16:rowId xmlns:a16="http://schemas.microsoft.com/office/drawing/2014/main" val="3630894509"/>
+                  </a:ext>
+                </a:extLst>
+              </a:tr>
+              <a:tr h="200025">
+                <a:tc>
+                  <a:txBody>
+                    <a:bodyPr/>
+                    <a:lstStyle/>
+                    <a:p>
+                      <a:pPr rtl="0" fontAlgn="b"/>
+                      <a:r>
+                        <a:rPr lang="en-US" sz="1200" b="0">
+                          <a:solidFill>
+                            <a:srgbClr val="7A7A7A"/>
+                          </a:solidFill>
+                          <a:effectLst/>
+                          <a:highlight>
+                            <a:srgbClr val="FFFFFF"/>
+                          </a:highlight>
+                          <a:latin typeface="Roboto" panose="02000000000000000000" pitchFamily="2" charset="0"/>
+                        </a:rPr>
+                        <a:t>1-3/4 inches thick</a:t>
+                      </a:r>
+                    </a:p>
+                  </a:txBody>
+                  <a:tcPr marL="28575" marR="28575" marT="19050" marB="19050" anchor="b">
+                    <a:lnL w="9525" cap="flat" cmpd="sng" algn="ctr">
+                      <a:solidFill>
+                        <a:srgbClr val="CCCCCC"/>
+                      </a:solidFill>
+                      <a:prstDash val="solid"/>
+                      <a:round/>
+                      <a:headEnd type="none" w="med" len="med"/>
+                      <a:tailEnd type="none" w="med" len="med"/>
+                    </a:lnL>
+                    <a:lnR w="9525" cap="flat" cmpd="sng" algn="ctr">
+                      <a:solidFill>
+                        <a:srgbClr val="CCCCCC"/>
+                      </a:solidFill>
+                      <a:prstDash val="solid"/>
+                      <a:round/>
+                      <a:headEnd type="none" w="med" len="med"/>
+                      <a:tailEnd type="none" w="med" len="med"/>
+                    </a:lnR>
+                    <a:lnT w="9525" cap="flat" cmpd="sng" algn="ctr">
+                      <a:solidFill>
+                        <a:srgbClr val="CCCCCC"/>
+                      </a:solidFill>
+                      <a:prstDash val="solid"/>
+                      <a:round/>
+                      <a:headEnd type="none" w="med" len="med"/>
+                      <a:tailEnd type="none" w="med" len="med"/>
+                    </a:lnT>
+                    <a:lnB w="9525" cap="flat" cmpd="sng" algn="ctr">
+                      <a:solidFill>
+                        <a:srgbClr val="CCCCCC"/>
+                      </a:solidFill>
+                      <a:prstDash val="solid"/>
+                      <a:round/>
+                      <a:headEnd type="none" w="med" len="med"/>
+                      <a:tailEnd type="none" w="med" len="med"/>
+                    </a:lnB>
+                    <a:solidFill>
+                      <a:srgbClr val="FFFFFF"/>
+                    </a:solidFill>
+                  </a:tcPr>
+                </a:tc>
+                <a:tc>
+                  <a:txBody>
+                    <a:bodyPr/>
+                    <a:lstStyle/>
+                    <a:p>
+                      <a:pPr rtl="0" fontAlgn="b"/>
+                      <a:r>
+                        <a:rPr lang="en-US" sz="1200" b="0">
+                          <a:solidFill>
+                            <a:srgbClr val="7A7A7A"/>
+                          </a:solidFill>
+                          <a:effectLst/>
+                          <a:highlight>
+                            <a:srgbClr val="FFFFFF"/>
+                          </a:highlight>
+                          <a:latin typeface="Roboto" panose="02000000000000000000" pitchFamily="2" charset="0"/>
+                        </a:rPr>
+                        <a:t>up to 36 inches</a:t>
+                      </a:r>
+                    </a:p>
+                  </a:txBody>
+                  <a:tcPr marL="28575" marR="28575" marT="19050" marB="19050" anchor="b">
+                    <a:lnL w="9525" cap="flat" cmpd="sng" algn="ctr">
+                      <a:solidFill>
+                        <a:srgbClr val="CCCCCC"/>
+                      </a:solidFill>
+                      <a:prstDash val="solid"/>
+                      <a:round/>
+                      <a:headEnd type="none" w="med" len="med"/>
+                      <a:tailEnd type="none" w="med" len="med"/>
+                    </a:lnL>
+                    <a:lnR w="9525" cap="flat" cmpd="sng" algn="ctr">
+                      <a:solidFill>
+                        <a:srgbClr val="40566A"/>
+                      </a:solidFill>
+                      <a:prstDash val="solid"/>
+                      <a:round/>
+                      <a:headEnd type="none" w="med" len="med"/>
+                      <a:tailEnd type="none" w="med" len="med"/>
+                    </a:lnR>
+                    <a:lnT w="9525" cap="flat" cmpd="sng" algn="ctr">
+                      <a:solidFill>
+                        <a:srgbClr val="CCCCCC"/>
+                      </a:solidFill>
+                      <a:prstDash val="solid"/>
+                      <a:round/>
+                      <a:headEnd type="none" w="med" len="med"/>
+                      <a:tailEnd type="none" w="med" len="med"/>
+                    </a:lnT>
+                    <a:lnB w="9525" cap="flat" cmpd="sng" algn="ctr">
+                      <a:solidFill>
+                        <a:srgbClr val="CCCCCC"/>
+                      </a:solidFill>
+                      <a:prstDash val="solid"/>
+                      <a:round/>
+                      <a:headEnd type="none" w="med" len="med"/>
+                      <a:tailEnd type="none" w="med" len="med"/>
+                    </a:lnB>
+                    <a:solidFill>
+                      <a:srgbClr val="FFFFFF"/>
+                    </a:solidFill>
+                  </a:tcPr>
+                </a:tc>
+                <a:tc>
+                  <a:txBody>
+                    <a:bodyPr/>
+                    <a:lstStyle/>
+                    <a:p>
+                      <a:pPr rtl="0" fontAlgn="b"/>
+                      <a:r>
+                        <a:rPr lang="en-US" sz="1200" b="0">
+                          <a:solidFill>
+                            <a:srgbClr val="7A7A7A"/>
+                          </a:solidFill>
+                          <a:effectLst/>
+                          <a:highlight>
+                            <a:srgbClr val="FFFFFF"/>
+                          </a:highlight>
+                          <a:latin typeface="Roboto" panose="02000000000000000000" pitchFamily="2" charset="0"/>
+                        </a:rPr>
+                        <a:t>4.5 x 4.5 hinge</a:t>
+                      </a:r>
+                    </a:p>
+                  </a:txBody>
+                  <a:tcPr marL="0" marR="0" marT="19050" marB="19050" anchor="b">
+                    <a:lnL w="9525" cap="flat" cmpd="sng" algn="ctr">
+                      <a:solidFill>
+                        <a:srgbClr val="40566A"/>
+                      </a:solidFill>
+                      <a:prstDash val="solid"/>
+                      <a:round/>
+                      <a:headEnd type="none" w="med" len="med"/>
+                      <a:tailEnd type="none" w="med" len="med"/>
+                    </a:lnL>
+                    <a:lnR w="9525" cap="flat" cmpd="sng" algn="ctr">
+                      <a:solidFill>
+                        <a:srgbClr val="40566A"/>
+                      </a:solidFill>
+                      <a:prstDash val="solid"/>
+                      <a:round/>
+                      <a:headEnd type="none" w="med" len="med"/>
+                      <a:tailEnd type="none" w="med" len="med"/>
+                    </a:lnR>
+                    <a:lnT w="9525" cap="flat" cmpd="sng" algn="ctr">
+                      <a:solidFill>
+                        <a:srgbClr val="40566A"/>
+                      </a:solidFill>
+                      <a:prstDash val="solid"/>
+                      <a:round/>
+                      <a:headEnd type="none" w="med" len="med"/>
+                      <a:tailEnd type="none" w="med" len="med"/>
+                    </a:lnT>
+                    <a:lnB w="9525" cap="flat" cmpd="sng" algn="ctr">
+                      <a:solidFill>
+                        <a:srgbClr val="CCCCCC"/>
+                      </a:solidFill>
+                      <a:prstDash val="solid"/>
+                      <a:round/>
+                      <a:headEnd type="none" w="med" len="med"/>
+                      <a:tailEnd type="none" w="med" len="med"/>
+                    </a:lnB>
+                    <a:solidFill>
+                      <a:srgbClr val="FFFFFF"/>
+                    </a:solidFill>
+                  </a:tcPr>
+                </a:tc>
+                <a:extLst>
+                  <a:ext uri="{0D108BD9-81ED-4DB2-BD59-A6C34878D82A}">
+                    <a16:rowId xmlns:a16="http://schemas.microsoft.com/office/drawing/2014/main" val="3304792015"/>
+                  </a:ext>
+                </a:extLst>
+              </a:tr>
+              <a:tr h="200025">
+                <a:tc>
+                  <a:txBody>
+                    <a:bodyPr/>
+                    <a:lstStyle/>
+                    <a:p>
+                      <a:pPr rtl="0" fontAlgn="b"/>
+                      <a:r>
+                        <a:rPr lang="en-US" sz="1200" b="0">
+                          <a:solidFill>
+                            <a:srgbClr val="7A7A7A"/>
+                          </a:solidFill>
+                          <a:effectLst/>
+                          <a:highlight>
+                            <a:srgbClr val="FFFFFF"/>
+                          </a:highlight>
+                          <a:latin typeface="Roboto" panose="02000000000000000000" pitchFamily="2" charset="0"/>
+                        </a:rPr>
+                        <a:t>1-3/4 inches thick</a:t>
+                      </a:r>
+                    </a:p>
+                  </a:txBody>
+                  <a:tcPr marL="28575" marR="28575" marT="19050" marB="19050" anchor="b">
+                    <a:lnL w="9525" cap="flat" cmpd="sng" algn="ctr">
+                      <a:solidFill>
+                        <a:srgbClr val="CCCCCC"/>
+                      </a:solidFill>
+                      <a:prstDash val="solid"/>
+                      <a:round/>
+                      <a:headEnd type="none" w="med" len="med"/>
+                      <a:tailEnd type="none" w="med" len="med"/>
+                    </a:lnL>
+                    <a:lnR w="9525" cap="flat" cmpd="sng" algn="ctr">
+                      <a:solidFill>
+                        <a:srgbClr val="CCCCCC"/>
+                      </a:solidFill>
+                      <a:prstDash val="solid"/>
+                      <a:round/>
+                      <a:headEnd type="none" w="med" len="med"/>
+                      <a:tailEnd type="none" w="med" len="med"/>
+                    </a:lnR>
+                    <a:lnT w="9525" cap="flat" cmpd="sng" algn="ctr">
+                      <a:solidFill>
+                        <a:srgbClr val="CCCCCC"/>
+                      </a:solidFill>
+                      <a:prstDash val="solid"/>
+                      <a:round/>
+                      <a:headEnd type="none" w="med" len="med"/>
+                      <a:tailEnd type="none" w="med" len="med"/>
+                    </a:lnT>
+                    <a:lnB w="9525" cap="flat" cmpd="sng" algn="ctr">
+                      <a:solidFill>
+                        <a:srgbClr val="EEEEEE"/>
+                      </a:solidFill>
+                      <a:prstDash val="solid"/>
+                      <a:round/>
+                      <a:headEnd type="none" w="med" len="med"/>
+                      <a:tailEnd type="none" w="med" len="med"/>
+                    </a:lnB>
+                    <a:solidFill>
+                      <a:srgbClr val="FFFFFF"/>
+                    </a:solidFill>
+                  </a:tcPr>
+                </a:tc>
+                <a:tc>
+                  <a:txBody>
+                    <a:bodyPr/>
+                    <a:lstStyle/>
+                    <a:p>
+                      <a:pPr rtl="0" fontAlgn="b"/>
+                      <a:r>
+                        <a:rPr lang="en-US" sz="1200" b="0">
+                          <a:solidFill>
+                            <a:srgbClr val="7A7A7A"/>
+                          </a:solidFill>
+                          <a:effectLst/>
+                          <a:highlight>
+                            <a:srgbClr val="FFFFFF"/>
+                          </a:highlight>
+                          <a:latin typeface="Roboto" panose="02000000000000000000" pitchFamily="2" charset="0"/>
+                        </a:rPr>
+                        <a:t>between 36 and 48 inches</a:t>
+                      </a:r>
+                    </a:p>
+                  </a:txBody>
+                  <a:tcPr marL="28575" marR="28575" marT="19050" marB="19050" anchor="b">
+                    <a:lnL w="9525" cap="flat" cmpd="sng" algn="ctr">
+                      <a:solidFill>
+                        <a:srgbClr val="CCCCCC"/>
+                      </a:solidFill>
+                      <a:prstDash val="solid"/>
+                      <a:round/>
+                      <a:headEnd type="none" w="med" len="med"/>
+                      <a:tailEnd type="none" w="med" len="med"/>
+                    </a:lnL>
+                    <a:lnR w="9525" cap="flat" cmpd="sng" algn="ctr">
+                      <a:solidFill>
+                        <a:srgbClr val="CCCCCC"/>
+                      </a:solidFill>
+                      <a:prstDash val="solid"/>
+                      <a:round/>
+                      <a:headEnd type="none" w="med" len="med"/>
+                      <a:tailEnd type="none" w="med" len="med"/>
+                    </a:lnR>
+                    <a:lnT w="9525" cap="flat" cmpd="sng" algn="ctr">
+                      <a:solidFill>
+                        <a:srgbClr val="CCCCCC"/>
+                      </a:solidFill>
+                      <a:prstDash val="solid"/>
+                      <a:round/>
+                      <a:headEnd type="none" w="med" len="med"/>
+                      <a:tailEnd type="none" w="med" len="med"/>
+                    </a:lnT>
+                    <a:lnB w="9525" cap="flat" cmpd="sng" algn="ctr">
+                      <a:solidFill>
+                        <a:srgbClr val="EEEEEE"/>
+                      </a:solidFill>
+                      <a:prstDash val="solid"/>
+                      <a:round/>
+                      <a:headEnd type="none" w="med" len="med"/>
+                      <a:tailEnd type="none" w="med" len="med"/>
+                    </a:lnB>
+                    <a:solidFill>
+                      <a:srgbClr val="FFFFFF"/>
+                    </a:solidFill>
+                  </a:tcPr>
+                </a:tc>
+                <a:tc>
+                  <a:txBody>
+                    <a:bodyPr/>
+                    <a:lstStyle/>
+                    <a:p>
+                      <a:pPr rtl="0" fontAlgn="b"/>
+                      <a:r>
+                        <a:rPr lang="en-US" sz="1200" b="0" dirty="0">
+                          <a:solidFill>
+                            <a:srgbClr val="7A7A7A"/>
+                          </a:solidFill>
+                          <a:effectLst/>
+                          <a:highlight>
+                            <a:srgbClr val="FFFFFF"/>
+                          </a:highlight>
+                          <a:latin typeface="Roboto" panose="02000000000000000000" pitchFamily="2" charset="0"/>
+                        </a:rPr>
+                        <a:t>5 x 5 hinge</a:t>
+                      </a:r>
+                    </a:p>
+                  </a:txBody>
+                  <a:tcPr marL="28575" marR="28575" marT="19050" marB="19050" anchor="b">
+                    <a:lnL w="9525" cap="flat" cmpd="sng" algn="ctr">
+                      <a:solidFill>
+                        <a:srgbClr val="CCCCCC"/>
+                      </a:solidFill>
+                      <a:prstDash val="solid"/>
+                      <a:round/>
+                      <a:headEnd type="none" w="med" len="med"/>
+                      <a:tailEnd type="none" w="med" len="med"/>
+                    </a:lnL>
+                    <a:lnR w="9525" cap="flat" cmpd="sng" algn="ctr">
+                      <a:solidFill>
+                        <a:srgbClr val="CCCCCC"/>
+                      </a:solidFill>
+                      <a:prstDash val="solid"/>
+                      <a:round/>
+                      <a:headEnd type="none" w="med" len="med"/>
+                      <a:tailEnd type="none" w="med" len="med"/>
+                    </a:lnR>
+                    <a:lnT w="9525" cap="flat" cmpd="sng" algn="ctr">
+                      <a:solidFill>
+                        <a:srgbClr val="CCCCCC"/>
+                      </a:solidFill>
+                      <a:prstDash val="solid"/>
+                      <a:round/>
+                      <a:headEnd type="none" w="med" len="med"/>
+                      <a:tailEnd type="none" w="med" len="med"/>
+                    </a:lnT>
+                    <a:lnB w="9525" cap="flat" cmpd="sng" algn="ctr">
+                      <a:solidFill>
+                        <a:srgbClr val="EEEEEE"/>
+                      </a:solidFill>
+                      <a:prstDash val="solid"/>
+                      <a:round/>
+                      <a:headEnd type="none" w="med" len="med"/>
+                      <a:tailEnd type="none" w="med" len="med"/>
+                    </a:lnB>
+                    <a:solidFill>
+                      <a:srgbClr val="FFFFFF"/>
+                    </a:solidFill>
+                  </a:tcPr>
+                </a:tc>
+                <a:extLst>
+                  <a:ext uri="{0D108BD9-81ED-4DB2-BD59-A6C34878D82A}">
+                    <a16:rowId xmlns:a16="http://schemas.microsoft.com/office/drawing/2014/main" val="2351316885"/>
+                  </a:ext>
+                </a:extLst>
+              </a:tr>
+            </a:tbl>
+          </a:graphicData>
+        </a:graphic>
+      </p:graphicFrame>
+    </p:spTree>
+    <p:extLst>
+      <p:ext uri="{BB962C8B-B14F-4D97-AF65-F5344CB8AC3E}">
+        <p14:creationId xmlns:p14="http://schemas.microsoft.com/office/powerpoint/2010/main" val="949535260"/>
       </p:ext>
     </p:extLst>
   </p:cSld>
